--- a/outputs/horas/Horas_Norte_Executivo.pptx
+++ b/outputs/horas/Horas_Norte_Executivo.pptx
@@ -9,6 +9,7 @@
     <p:sldId id="257" r:id="rId9"/>
     <p:sldId id="258" r:id="rId10"/>
     <p:sldId id="259" r:id="rId11"/>
+    <p:sldId id="260" r:id="rId12"/>
   </p:sldIdLst>
   <p:sldSz cx="12192000" cy="6858000" type="screen4x3"/>
   <p:notesSz cx="6858000" cy="9144000"/>
@@ -982,7 +983,7 @@
           <a:lstStyle/>
           <a:p>
             <a:r>
-              <a:t>SLIDE 2 — CAUSA/ondе (ociosidade). HC/dia e horas de espera x acionamento; faixa horária orienta o redimensionamento. Números do JSON (ociosidade, faixa_horaria).</a:t>
+              <a:t>SLIDE 2 — CAUSA/onde (ociosidade + regimes). HC/dia e horas de espera x acionamento; painel C mostra dia útil (noturno) x FDS (diurno). Números do JSON (ociosidade, inteligencia.regimes).</a:t>
             </a:r>
           </a:p>
         </p:txBody>
@@ -1052,7 +1053,7 @@
           <a:lstStyle/>
           <a:p>
             <a:r>
-              <a:t>SLIDE 3 — CAUSA/quem (por GA). Ranking de horas de sobreaviso por gestor, espera x acionamento, e a concentração nas 3 primeiras áreas. Do JSON (sobreaviso_por_ga).</a:t>
+              <a:t>SLIDE 3 — CAUSA/quem (por GA). Ranking de horas + frequência de acionamento: GA que aciona todo dia tem demanda estrutural (instrumento errado: sobreaviso); GA eventual usa sobreaviso corretamente. Do JSON (sobreaviso_por_ga, inteligencia.gas).</a:t>
             </a:r>
           </a:p>
         </p:txBody>
@@ -1122,7 +1123,77 @@
           <a:lstStyle/>
           <a:p>
             <a:r>
-              <a:t>SLIDE 4 — AÇÃO (proposta + FCA). Orçado-&gt;Proposta (-50%), 3 alavancas e a tabela FCA. Edite textos em narrativa_&lt;regiao&gt;.json (s4).</a:t>
+              <a:t>SLIDE 4 — RISCO x CUSTO-BENEFÍCIO. Dimensionamento por GA (mediana=turno fixo, p90=sobreaviso residual, máx=backup), regra de piso, conta da conversão e nominal dos técnicos mais acionados. Do JSON (inteligencia).</a:t>
+            </a:r>
+          </a:p>
+        </p:txBody>
+      </p:sp>
+      <p:sp>
+        <p:nvSpPr>
+          <p:cNvPr id="4" name="Slide Number Placeholder 3"/>
+          <p:cNvSpPr>
+            <a:spLocks noGrp="1"/>
+          </p:cNvSpPr>
+          <p:nvPr>
+            <p:ph type="sldNum" idx="5" sz="quarter"/>
+          </p:nvPr>
+        </p:nvSpPr>
+        <p:spPr/>
+      </p:sp>
+    </p:spTree>
+  </p:cSld>
+  <p:clrMapOvr>
+    <a:masterClrMapping/>
+  </p:clrMapOvr>
+</p:notes>
+</file>
+
+<file path=ppt/notesSlides/notesSlide5.xml><?xml version="1.0" encoding="utf-8"?>
+<p:notes xmlns:a="http://schemas.openxmlformats.org/drawingml/2006/main" xmlns:p="http://schemas.openxmlformats.org/presentationml/2006/main" xmlns:r="http://schemas.openxmlformats.org/officeDocument/2006/relationships">
+  <p:cSld>
+    <p:spTree>
+      <p:nvGrpSpPr>
+        <p:cNvPr id="1" name=""/>
+        <p:cNvGrpSpPr/>
+        <p:nvPr/>
+      </p:nvGrpSpPr>
+      <p:grpSpPr>
+        <a:xfrm>
+          <a:off x="0" y="0"/>
+          <a:ext cx="0" cy="0"/>
+          <a:chOff x="0" y="0"/>
+          <a:chExt cx="0" cy="0"/>
+        </a:xfrm>
+      </p:grpSpPr>
+      <p:sp>
+        <p:nvSpPr>
+          <p:cNvPr id="2" name="Slide Image Placeholder 1"/>
+          <p:cNvSpPr>
+            <a:spLocks noGrp="1"/>
+          </p:cNvSpPr>
+          <p:nvPr>
+            <p:ph type="sldImg" idx="2"/>
+          </p:nvPr>
+        </p:nvSpPr>
+        <p:spPr/>
+      </p:sp>
+      <p:sp>
+        <p:nvSpPr>
+          <p:cNvPr id="3" name="Notes Placeholder 2"/>
+          <p:cNvSpPr>
+            <a:spLocks noGrp="1"/>
+          </p:cNvSpPr>
+          <p:nvPr>
+            <p:ph type="body" idx="3" sz="quarter"/>
+          </p:nvPr>
+        </p:nvSpPr>
+        <p:spPr/>
+        <p:txBody>
+          <a:bodyPr/>
+          <a:lstStyle/>
+          <a:p>
+            <a:r>
+              <a:t>SLIDE 5 — AÇÃO (proposta + FCA cirúrgico). Orçado-&gt;Proposta (-50%), 3 alavancas e a tabela FCA com ações específicas por GA. Edite textos em narrativa_&lt;regiao&gt;.json (s5).</a:t>
             </a:r>
           </a:p>
         </p:txBody>
@@ -4367,7 +4438,7 @@
                 </a:solidFill>
                 <a:latin typeface="Aptos"/>
               </a:rPr>
-              <a:t>1 / 4</a:t>
+              <a:t>1 / 5</a:t>
             </a:r>
           </a:p>
         </p:txBody>
@@ -6073,7 +6144,7 @@
                 </a:solidFill>
                 <a:latin typeface="Aptos"/>
               </a:rPr>
-              <a:t>Atacar o sobreaviso, que sozinho responde por 86% da cesta e é a parte controlável do custo. Aqui o realizado já supera o orçado, e é onde há mais plantão ocioso para cortar sem afetar a operação.</a:t>
+              <a:t>Atacar o sobreaviso, que sozinho responde por 86% da cesta. Não com corte cego de plantão: 3 GAs acionam praticamente todo dia — ali o problema é o instrumento, não o excesso de cobertura.</a:t>
             </a:r>
           </a:p>
         </p:txBody>
@@ -6335,7 +6406,7 @@
                 </a:solidFill>
                 <a:latin typeface="Aptos"/>
               </a:rPr>
-              <a:t>2 / 4</a:t>
+              <a:t>2 / 5</a:t>
             </a:r>
           </a:p>
         </p:txBody>
@@ -6413,7 +6484,7 @@
                 </a:solidFill>
                 <a:latin typeface="Aptos Display"/>
               </a:rPr>
-              <a:t>Paga-se muito plantão em espera e aciona-se pouco: só 21% do sobreaviso vira trabalho</a:t>
+              <a:t>Paga-se muito plantão em espera — e o acionamento tem dois padrões distintos</a:t>
             </a:r>
           </a:p>
         </p:txBody>
@@ -7639,7 +7710,7 @@
         <p:spPr>
           <a:xfrm>
             <a:off x="742950" y="4095750"/>
-            <a:ext cx="7620000" cy="171450"/>
+            <a:ext cx="8572500" cy="171450"/>
           </a:xfrm>
           <a:prstGeom prst="rect">
             <a:avLst/>
@@ -7664,7 +7735,7 @@
                 </a:solidFill>
                 <a:latin typeface="Aptos"/>
               </a:rPr>
-              <a:t>Quando o acionamento realmente acontece — horas por faixa horária</a:t>
+              <a:t>Não é um problema só: no dia útil o acionamento é noturno; no fim de semana, diurno</a:t>
             </a:r>
           </a:p>
         </p:txBody>
@@ -7703,7 +7774,7 @@
                 </a:solidFill>
                 <a:latin typeface="Aptos"/>
               </a:rPr>
-              <a:t>Base para redimensionar a escala: manter plantão onde a demanda existe, enxugar nas faixas de baixo acionamento.</a:t>
+              <a:t>Horas de acionamento por faixa horária, separadas em dia útil × sábado/domingo.</a:t>
             </a:r>
           </a:p>
         </p:txBody>
@@ -7717,7 +7788,7 @@
         <p:spPr>
           <a:xfrm>
             <a:off x="742950" y="4610100"/>
-            <a:ext cx="914400" cy="152400"/>
+            <a:ext cx="876300" cy="152400"/>
           </a:xfrm>
           <a:prstGeom prst="rect">
             <a:avLst/>
@@ -7755,8 +7826,8 @@
         </p:nvSpPr>
         <p:spPr>
           <a:xfrm>
-            <a:off x="1733550" y="4629150"/>
-            <a:ext cx="4476750" cy="123825"/>
+            <a:off x="1657350" y="4629150"/>
+            <a:ext cx="4191000" cy="133350"/>
           </a:xfrm>
           <a:prstGeom prst="rect">
             <a:avLst/>
@@ -7799,8 +7870,8 @@
         </p:nvSpPr>
         <p:spPr>
           <a:xfrm>
-            <a:off x="1733550" y="4629150"/>
-            <a:ext cx="4476750" cy="123825"/>
+            <a:off x="1657350" y="4629150"/>
+            <a:ext cx="4124686" cy="133350"/>
           </a:xfrm>
           <a:prstGeom prst="rect">
             <a:avLst/>
@@ -7837,14 +7908,58 @@
       </p:sp>
       <p:sp>
         <p:nvSpPr>
-          <p:cNvPr id="44" name="TextBox 43"/>
+          <p:cNvPr id="44" name="Rectangle 43"/>
+          <p:cNvSpPr/>
+          <p:nvPr/>
+        </p:nvSpPr>
+        <p:spPr>
+          <a:xfrm>
+            <a:off x="5782036" y="4629150"/>
+            <a:ext cx="66313" cy="133350"/>
+          </a:xfrm>
+          <a:prstGeom prst="rect">
+            <a:avLst/>
+          </a:prstGeom>
+          <a:solidFill>
+            <a:srgbClr val="13853A"/>
+          </a:solidFill>
+          <a:ln>
+            <a:noFill/>
+          </a:ln>
+          <a:effectLst/>
+        </p:spPr>
+        <p:style>
+          <a:lnRef idx="1">
+            <a:schemeClr val="accent1"/>
+          </a:lnRef>
+          <a:fillRef idx="3">
+            <a:schemeClr val="accent1"/>
+          </a:fillRef>
+          <a:effectRef idx="2">
+            <a:schemeClr val="accent1"/>
+          </a:effectRef>
+          <a:fontRef idx="minor">
+            <a:schemeClr val="lt1"/>
+          </a:fontRef>
+        </p:style>
+        <p:txBody>
+          <a:bodyPr rtlCol="0" anchor="ctr"/>
+          <a:lstStyle/>
+          <a:p>
+            <a:pPr algn="ctr"/>
+          </a:p>
+        </p:txBody>
+      </p:sp>
+      <p:sp>
+        <p:nvSpPr>
+          <p:cNvPr id="45" name="TextBox 44"/>
           <p:cNvSpPr txBox="1"/>
           <p:nvPr/>
         </p:nvSpPr>
         <p:spPr>
           <a:xfrm>
-            <a:off x="6286500" y="4610100"/>
-            <a:ext cx="666750" cy="152400"/>
+            <a:off x="5943600" y="4610100"/>
+            <a:ext cx="609600" cy="152400"/>
           </a:xfrm>
           <a:prstGeom prst="rect">
             <a:avLst/>
@@ -7863,27 +7978,27 @@
               </a:lnSpc>
             </a:pPr>
             <a:r>
-              <a:rPr sz="1100" b="1">
+              <a:rPr sz="1050" b="1">
                 <a:solidFill>
                   <a:srgbClr val="182238"/>
                 </a:solidFill>
                 <a:latin typeface="Aptos"/>
               </a:rPr>
-              <a:t>782 h</a:t>
-            </a:r>
-          </a:p>
-        </p:txBody>
-      </p:sp>
-      <p:sp>
-        <p:nvSpPr>
-          <p:cNvPr id="45" name="TextBox 44"/>
+              <a:t>758 h</a:t>
+            </a:r>
+          </a:p>
+        </p:txBody>
+      </p:sp>
+      <p:sp>
+        <p:nvSpPr>
+          <p:cNvPr id="46" name="TextBox 45"/>
           <p:cNvSpPr txBox="1"/>
           <p:nvPr/>
         </p:nvSpPr>
         <p:spPr>
           <a:xfrm>
-            <a:off x="7124700" y="4610100"/>
-            <a:ext cx="666750" cy="152400"/>
+            <a:off x="6572250" y="4610100"/>
+            <a:ext cx="762000" cy="152400"/>
           </a:xfrm>
           <a:prstGeom prst="rect">
             <a:avLst/>
@@ -7902,27 +8017,525 @@
               </a:lnSpc>
             </a:pPr>
             <a:r>
-              <a:rPr sz="1050" b="1">
+              <a:rPr sz="1050" b="0">
                 <a:solidFill>
                   <a:srgbClr val="667085"/>
                 </a:solidFill>
                 <a:latin typeface="Aptos"/>
               </a:rPr>
-              <a:t>44%</a:t>
-            </a:r>
-          </a:p>
-        </p:txBody>
-      </p:sp>
-      <p:sp>
-        <p:nvSpPr>
-          <p:cNvPr id="46" name="TextBox 45"/>
+              <a:t>2% FDS</a:t>
+            </a:r>
+          </a:p>
+        </p:txBody>
+      </p:sp>
+      <p:sp>
+        <p:nvSpPr>
+          <p:cNvPr id="47" name="TextBox 46"/>
           <p:cNvSpPr txBox="1"/>
           <p:nvPr/>
         </p:nvSpPr>
         <p:spPr>
           <a:xfrm>
             <a:off x="742950" y="4933950"/>
-            <a:ext cx="914400" cy="152400"/>
+            <a:ext cx="876300" cy="152400"/>
+          </a:xfrm>
+          <a:prstGeom prst="rect">
+            <a:avLst/>
+          </a:prstGeom>
+          <a:noFill/>
+        </p:spPr>
+        <p:txBody>
+          <a:bodyPr wrap="square" anchor="t" lIns="0" rIns="0" tIns="0" bIns="0">
+            <a:spAutoFit/>
+          </a:bodyPr>
+          <a:lstStyle/>
+          <a:p>
+            <a:pPr algn="l">
+              <a:lnSpc>
+                <a:spcPct val="106000"/>
+              </a:lnSpc>
+            </a:pPr>
+            <a:r>
+              <a:rPr sz="1050" b="0">
+                <a:solidFill>
+                  <a:srgbClr val="182238"/>
+                </a:solidFill>
+                <a:latin typeface="Aptos"/>
+              </a:rPr>
+              <a:t>Madrugada</a:t>
+            </a:r>
+          </a:p>
+        </p:txBody>
+      </p:sp>
+      <p:sp>
+        <p:nvSpPr>
+          <p:cNvPr id="48" name="Rectangle 47"/>
+          <p:cNvSpPr/>
+          <p:nvPr/>
+        </p:nvSpPr>
+        <p:spPr>
+          <a:xfrm>
+            <a:off x="1657350" y="4953000"/>
+            <a:ext cx="4191000" cy="133350"/>
+          </a:xfrm>
+          <a:prstGeom prst="rect">
+            <a:avLst/>
+          </a:prstGeom>
+          <a:solidFill>
+            <a:srgbClr val="E7EDF5"/>
+          </a:solidFill>
+          <a:ln>
+            <a:noFill/>
+          </a:ln>
+          <a:effectLst/>
+        </p:spPr>
+        <p:style>
+          <a:lnRef idx="1">
+            <a:schemeClr val="accent1"/>
+          </a:lnRef>
+          <a:fillRef idx="3">
+            <a:schemeClr val="accent1"/>
+          </a:fillRef>
+          <a:effectRef idx="2">
+            <a:schemeClr val="accent1"/>
+          </a:effectRef>
+          <a:fontRef idx="minor">
+            <a:schemeClr val="lt1"/>
+          </a:fontRef>
+        </p:style>
+        <p:txBody>
+          <a:bodyPr rtlCol="0" anchor="ctr"/>
+          <a:lstStyle/>
+          <a:p>
+            <a:pPr algn="ctr"/>
+          </a:p>
+        </p:txBody>
+      </p:sp>
+      <p:sp>
+        <p:nvSpPr>
+          <p:cNvPr id="49" name="Rectangle 48"/>
+          <p:cNvSpPr/>
+          <p:nvPr/>
+        </p:nvSpPr>
+        <p:spPr>
+          <a:xfrm>
+            <a:off x="1657350" y="4953000"/>
+            <a:ext cx="776970" cy="133350"/>
+          </a:xfrm>
+          <a:prstGeom prst="rect">
+            <a:avLst/>
+          </a:prstGeom>
+          <a:solidFill>
+            <a:srgbClr val="081551"/>
+          </a:solidFill>
+          <a:ln>
+            <a:noFill/>
+          </a:ln>
+          <a:effectLst/>
+        </p:spPr>
+        <p:style>
+          <a:lnRef idx="1">
+            <a:schemeClr val="accent1"/>
+          </a:lnRef>
+          <a:fillRef idx="3">
+            <a:schemeClr val="accent1"/>
+          </a:fillRef>
+          <a:effectRef idx="2">
+            <a:schemeClr val="accent1"/>
+          </a:effectRef>
+          <a:fontRef idx="minor">
+            <a:schemeClr val="lt1"/>
+          </a:fontRef>
+        </p:style>
+        <p:txBody>
+          <a:bodyPr rtlCol="0" anchor="ctr"/>
+          <a:lstStyle/>
+          <a:p>
+            <a:pPr algn="ctr"/>
+          </a:p>
+        </p:txBody>
+      </p:sp>
+      <p:sp>
+        <p:nvSpPr>
+          <p:cNvPr id="50" name="Rectangle 49"/>
+          <p:cNvSpPr/>
+          <p:nvPr/>
+        </p:nvSpPr>
+        <p:spPr>
+          <a:xfrm>
+            <a:off x="2434320" y="4953000"/>
+            <a:ext cx="627213" cy="133350"/>
+          </a:xfrm>
+          <a:prstGeom prst="rect">
+            <a:avLst/>
+          </a:prstGeom>
+          <a:solidFill>
+            <a:srgbClr val="13853A"/>
+          </a:solidFill>
+          <a:ln>
+            <a:noFill/>
+          </a:ln>
+          <a:effectLst/>
+        </p:spPr>
+        <p:style>
+          <a:lnRef idx="1">
+            <a:schemeClr val="accent1"/>
+          </a:lnRef>
+          <a:fillRef idx="3">
+            <a:schemeClr val="accent1"/>
+          </a:fillRef>
+          <a:effectRef idx="2">
+            <a:schemeClr val="accent1"/>
+          </a:effectRef>
+          <a:fontRef idx="minor">
+            <a:schemeClr val="lt1"/>
+          </a:fontRef>
+        </p:style>
+        <p:txBody>
+          <a:bodyPr rtlCol="0" anchor="ctr"/>
+          <a:lstStyle/>
+          <a:p>
+            <a:pPr algn="ctr"/>
+          </a:p>
+        </p:txBody>
+      </p:sp>
+      <p:sp>
+        <p:nvSpPr>
+          <p:cNvPr id="51" name="TextBox 50"/>
+          <p:cNvSpPr txBox="1"/>
+          <p:nvPr/>
+        </p:nvSpPr>
+        <p:spPr>
+          <a:xfrm>
+            <a:off x="5943600" y="4933950"/>
+            <a:ext cx="609600" cy="152400"/>
+          </a:xfrm>
+          <a:prstGeom prst="rect">
+            <a:avLst/>
+          </a:prstGeom>
+          <a:noFill/>
+        </p:spPr>
+        <p:txBody>
+          <a:bodyPr wrap="square" anchor="t" lIns="0" rIns="0" tIns="0" bIns="0">
+            <a:spAutoFit/>
+          </a:bodyPr>
+          <a:lstStyle/>
+          <a:p>
+            <a:pPr algn="l">
+              <a:lnSpc>
+                <a:spcPct val="106000"/>
+              </a:lnSpc>
+            </a:pPr>
+            <a:r>
+              <a:rPr sz="1050" b="1">
+                <a:solidFill>
+                  <a:srgbClr val="182238"/>
+                </a:solidFill>
+                <a:latin typeface="Aptos"/>
+              </a:rPr>
+              <a:t>254 h</a:t>
+            </a:r>
+          </a:p>
+        </p:txBody>
+      </p:sp>
+      <p:sp>
+        <p:nvSpPr>
+          <p:cNvPr id="52" name="TextBox 51"/>
+          <p:cNvSpPr txBox="1"/>
+          <p:nvPr/>
+        </p:nvSpPr>
+        <p:spPr>
+          <a:xfrm>
+            <a:off x="6572250" y="4933950"/>
+            <a:ext cx="762000" cy="152400"/>
+          </a:xfrm>
+          <a:prstGeom prst="rect">
+            <a:avLst/>
+          </a:prstGeom>
+          <a:noFill/>
+        </p:spPr>
+        <p:txBody>
+          <a:bodyPr wrap="square" anchor="t" lIns="0" rIns="0" tIns="0" bIns="0">
+            <a:spAutoFit/>
+          </a:bodyPr>
+          <a:lstStyle/>
+          <a:p>
+            <a:pPr algn="l">
+              <a:lnSpc>
+                <a:spcPct val="106000"/>
+              </a:lnSpc>
+            </a:pPr>
+            <a:r>
+              <a:rPr sz="1050" b="0">
+                <a:solidFill>
+                  <a:srgbClr val="667085"/>
+                </a:solidFill>
+                <a:latin typeface="Aptos"/>
+              </a:rPr>
+              <a:t>45% FDS</a:t>
+            </a:r>
+          </a:p>
+        </p:txBody>
+      </p:sp>
+      <p:sp>
+        <p:nvSpPr>
+          <p:cNvPr id="53" name="TextBox 52"/>
+          <p:cNvSpPr txBox="1"/>
+          <p:nvPr/>
+        </p:nvSpPr>
+        <p:spPr>
+          <a:xfrm>
+            <a:off x="742950" y="5257800"/>
+            <a:ext cx="876300" cy="152400"/>
+          </a:xfrm>
+          <a:prstGeom prst="rect">
+            <a:avLst/>
+          </a:prstGeom>
+          <a:noFill/>
+        </p:spPr>
+        <p:txBody>
+          <a:bodyPr wrap="square" anchor="t" lIns="0" rIns="0" tIns="0" bIns="0">
+            <a:spAutoFit/>
+          </a:bodyPr>
+          <a:lstStyle/>
+          <a:p>
+            <a:pPr algn="l">
+              <a:lnSpc>
+                <a:spcPct val="106000"/>
+              </a:lnSpc>
+            </a:pPr>
+            <a:r>
+              <a:rPr sz="1050" b="0">
+                <a:solidFill>
+                  <a:srgbClr val="182238"/>
+                </a:solidFill>
+                <a:latin typeface="Aptos"/>
+              </a:rPr>
+              <a:t>Dia</a:t>
+            </a:r>
+          </a:p>
+        </p:txBody>
+      </p:sp>
+      <p:sp>
+        <p:nvSpPr>
+          <p:cNvPr id="54" name="Rectangle 53"/>
+          <p:cNvSpPr/>
+          <p:nvPr/>
+        </p:nvSpPr>
+        <p:spPr>
+          <a:xfrm>
+            <a:off x="1657350" y="5276850"/>
+            <a:ext cx="4191000" cy="133350"/>
+          </a:xfrm>
+          <a:prstGeom prst="rect">
+            <a:avLst/>
+          </a:prstGeom>
+          <a:solidFill>
+            <a:srgbClr val="E7EDF5"/>
+          </a:solidFill>
+          <a:ln>
+            <a:noFill/>
+          </a:ln>
+          <a:effectLst/>
+        </p:spPr>
+        <p:style>
+          <a:lnRef idx="1">
+            <a:schemeClr val="accent1"/>
+          </a:lnRef>
+          <a:fillRef idx="3">
+            <a:schemeClr val="accent1"/>
+          </a:fillRef>
+          <a:effectRef idx="2">
+            <a:schemeClr val="accent1"/>
+          </a:effectRef>
+          <a:fontRef idx="minor">
+            <a:schemeClr val="lt1"/>
+          </a:fontRef>
+        </p:style>
+        <p:txBody>
+          <a:bodyPr rtlCol="0" anchor="ctr"/>
+          <a:lstStyle/>
+          <a:p>
+            <a:pPr algn="ctr"/>
+          </a:p>
+        </p:txBody>
+      </p:sp>
+      <p:sp>
+        <p:nvSpPr>
+          <p:cNvPr id="55" name="Rectangle 54"/>
+          <p:cNvSpPr/>
+          <p:nvPr/>
+        </p:nvSpPr>
+        <p:spPr>
+          <a:xfrm>
+            <a:off x="1657350" y="5276850"/>
+            <a:ext cx="334329" cy="133350"/>
+          </a:xfrm>
+          <a:prstGeom prst="rect">
+            <a:avLst/>
+          </a:prstGeom>
+          <a:solidFill>
+            <a:srgbClr val="081551"/>
+          </a:solidFill>
+          <a:ln>
+            <a:noFill/>
+          </a:ln>
+          <a:effectLst/>
+        </p:spPr>
+        <p:style>
+          <a:lnRef idx="1">
+            <a:schemeClr val="accent1"/>
+          </a:lnRef>
+          <a:fillRef idx="3">
+            <a:schemeClr val="accent1"/>
+          </a:fillRef>
+          <a:effectRef idx="2">
+            <a:schemeClr val="accent1"/>
+          </a:effectRef>
+          <a:fontRef idx="minor">
+            <a:schemeClr val="lt1"/>
+          </a:fontRef>
+        </p:style>
+        <p:txBody>
+          <a:bodyPr rtlCol="0" anchor="ctr"/>
+          <a:lstStyle/>
+          <a:p>
+            <a:pPr algn="ctr"/>
+          </a:p>
+        </p:txBody>
+      </p:sp>
+      <p:sp>
+        <p:nvSpPr>
+          <p:cNvPr id="56" name="Rectangle 55"/>
+          <p:cNvSpPr/>
+          <p:nvPr/>
+        </p:nvSpPr>
+        <p:spPr>
+          <a:xfrm>
+            <a:off x="1991679" y="5276850"/>
+            <a:ext cx="1052170" cy="133350"/>
+          </a:xfrm>
+          <a:prstGeom prst="rect">
+            <a:avLst/>
+          </a:prstGeom>
+          <a:solidFill>
+            <a:srgbClr val="13853A"/>
+          </a:solidFill>
+          <a:ln>
+            <a:noFill/>
+          </a:ln>
+          <a:effectLst/>
+        </p:spPr>
+        <p:style>
+          <a:lnRef idx="1">
+            <a:schemeClr val="accent1"/>
+          </a:lnRef>
+          <a:fillRef idx="3">
+            <a:schemeClr val="accent1"/>
+          </a:fillRef>
+          <a:effectRef idx="2">
+            <a:schemeClr val="accent1"/>
+          </a:effectRef>
+          <a:fontRef idx="minor">
+            <a:schemeClr val="lt1"/>
+          </a:fontRef>
+        </p:style>
+        <p:txBody>
+          <a:bodyPr rtlCol="0" anchor="ctr"/>
+          <a:lstStyle/>
+          <a:p>
+            <a:pPr algn="ctr"/>
+          </a:p>
+        </p:txBody>
+      </p:sp>
+      <p:sp>
+        <p:nvSpPr>
+          <p:cNvPr id="57" name="TextBox 56"/>
+          <p:cNvSpPr txBox="1"/>
+          <p:nvPr/>
+        </p:nvSpPr>
+        <p:spPr>
+          <a:xfrm>
+            <a:off x="5943600" y="5257800"/>
+            <a:ext cx="609600" cy="152400"/>
+          </a:xfrm>
+          <a:prstGeom prst="rect">
+            <a:avLst/>
+          </a:prstGeom>
+          <a:noFill/>
+        </p:spPr>
+        <p:txBody>
+          <a:bodyPr wrap="square" anchor="t" lIns="0" rIns="0" tIns="0" bIns="0">
+            <a:spAutoFit/>
+          </a:bodyPr>
+          <a:lstStyle/>
+          <a:p>
+            <a:pPr algn="l">
+              <a:lnSpc>
+                <a:spcPct val="106000"/>
+              </a:lnSpc>
+            </a:pPr>
+            <a:r>
+              <a:rPr sz="1050" b="1">
+                <a:solidFill>
+                  <a:srgbClr val="182238"/>
+                </a:solidFill>
+                <a:latin typeface="Aptos"/>
+              </a:rPr>
+              <a:t>251 h</a:t>
+            </a:r>
+          </a:p>
+        </p:txBody>
+      </p:sp>
+      <p:sp>
+        <p:nvSpPr>
+          <p:cNvPr id="58" name="TextBox 57"/>
+          <p:cNvSpPr txBox="1"/>
+          <p:nvPr/>
+        </p:nvSpPr>
+        <p:spPr>
+          <a:xfrm>
+            <a:off x="6572250" y="5257800"/>
+            <a:ext cx="762000" cy="152400"/>
+          </a:xfrm>
+          <a:prstGeom prst="rect">
+            <a:avLst/>
+          </a:prstGeom>
+          <a:noFill/>
+        </p:spPr>
+        <p:txBody>
+          <a:bodyPr wrap="square" anchor="t" lIns="0" rIns="0" tIns="0" bIns="0">
+            <a:spAutoFit/>
+          </a:bodyPr>
+          <a:lstStyle/>
+          <a:p>
+            <a:pPr algn="l">
+              <a:lnSpc>
+                <a:spcPct val="106000"/>
+              </a:lnSpc>
+            </a:pPr>
+            <a:r>
+              <a:rPr sz="1050" b="1">
+                <a:solidFill>
+                  <a:srgbClr val="13853A"/>
+                </a:solidFill>
+                <a:latin typeface="Aptos"/>
+              </a:rPr>
+              <a:t>76% FDS</a:t>
+            </a:r>
+          </a:p>
+        </p:txBody>
+      </p:sp>
+      <p:sp>
+        <p:nvSpPr>
+          <p:cNvPr id="59" name="TextBox 58"/>
+          <p:cNvSpPr txBox="1"/>
+          <p:nvPr/>
+        </p:nvSpPr>
+        <p:spPr>
+          <a:xfrm>
+            <a:off x="742950" y="5581650"/>
+            <a:ext cx="876300" cy="152400"/>
           </a:xfrm>
           <a:prstGeom prst="rect">
             <a:avLst/>
@@ -7954,14 +8567,14 @@
       </p:sp>
       <p:sp>
         <p:nvSpPr>
-          <p:cNvPr id="47" name="Rectangle 46"/>
+          <p:cNvPr id="60" name="Rectangle 59"/>
           <p:cNvSpPr/>
           <p:nvPr/>
         </p:nvSpPr>
         <p:spPr>
           <a:xfrm>
-            <a:off x="1733550" y="4953000"/>
-            <a:ext cx="4476750" cy="123825"/>
+            <a:off x="1657350" y="5600700"/>
+            <a:ext cx="4191000" cy="133350"/>
           </a:xfrm>
           <a:prstGeom prst="rect">
             <a:avLst/>
@@ -7998,20 +8611,20 @@
       </p:sp>
       <p:sp>
         <p:nvSpPr>
-          <p:cNvPr id="48" name="Rectangle 47"/>
+          <p:cNvPr id="61" name="Rectangle 60"/>
           <p:cNvSpPr/>
           <p:nvPr/>
         </p:nvSpPr>
         <p:spPr>
           <a:xfrm>
-            <a:off x="1733550" y="4953000"/>
-            <a:ext cx="2887632" cy="123825"/>
+            <a:off x="1657350" y="5600700"/>
+            <a:ext cx="2788473" cy="133350"/>
           </a:xfrm>
           <a:prstGeom prst="rect">
             <a:avLst/>
           </a:prstGeom>
           <a:solidFill>
-            <a:srgbClr val="1476C9"/>
+            <a:srgbClr val="13853A"/>
           </a:solidFill>
           <a:ln>
             <a:noFill/>
@@ -8042,14 +8655,14 @@
       </p:sp>
       <p:sp>
         <p:nvSpPr>
-          <p:cNvPr id="49" name="TextBox 48"/>
+          <p:cNvPr id="62" name="TextBox 61"/>
           <p:cNvSpPr txBox="1"/>
           <p:nvPr/>
         </p:nvSpPr>
         <p:spPr>
           <a:xfrm>
-            <a:off x="6286500" y="4933950"/>
-            <a:ext cx="666750" cy="152400"/>
+            <a:off x="5943600" y="5581650"/>
+            <a:ext cx="609600" cy="152400"/>
           </a:xfrm>
           <a:prstGeom prst="rect">
             <a:avLst/>
@@ -8068,7 +8681,7 @@
               </a:lnSpc>
             </a:pPr>
             <a:r>
-              <a:rPr sz="1100" b="1">
+              <a:rPr sz="1050" b="1">
                 <a:solidFill>
                   <a:srgbClr val="182238"/>
                 </a:solidFill>
@@ -8081,14 +8694,14 @@
       </p:sp>
       <p:sp>
         <p:nvSpPr>
-          <p:cNvPr id="50" name="TextBox 49"/>
+          <p:cNvPr id="63" name="TextBox 62"/>
           <p:cNvSpPr txBox="1"/>
           <p:nvPr/>
         </p:nvSpPr>
         <p:spPr>
           <a:xfrm>
-            <a:off x="7124700" y="4933950"/>
-            <a:ext cx="666750" cy="152400"/>
+            <a:off x="6572250" y="5581650"/>
+            <a:ext cx="762000" cy="152400"/>
           </a:xfrm>
           <a:prstGeom prst="rect">
             <a:avLst/>
@@ -8109,25 +8722,69 @@
             <a:r>
               <a:rPr sz="1050" b="1">
                 <a:solidFill>
-                  <a:srgbClr val="667085"/>
+                  <a:srgbClr val="13853A"/>
                 </a:solidFill>
                 <a:latin typeface="Aptos"/>
               </a:rPr>
-              <a:t>29%</a:t>
-            </a:r>
-          </a:p>
-        </p:txBody>
-      </p:sp>
-      <p:sp>
-        <p:nvSpPr>
-          <p:cNvPr id="51" name="TextBox 50"/>
+              <a:t>100% FDS</a:t>
+            </a:r>
+          </a:p>
+        </p:txBody>
+      </p:sp>
+      <p:sp>
+        <p:nvSpPr>
+          <p:cNvPr id="64" name="Rectangle 63"/>
+          <p:cNvSpPr/>
+          <p:nvPr/>
+        </p:nvSpPr>
+        <p:spPr>
+          <a:xfrm>
+            <a:off x="1657350" y="5943600"/>
+            <a:ext cx="104775" cy="104775"/>
+          </a:xfrm>
+          <a:prstGeom prst="rect">
+            <a:avLst/>
+          </a:prstGeom>
+          <a:solidFill>
+            <a:srgbClr val="081551"/>
+          </a:solidFill>
+          <a:ln>
+            <a:noFill/>
+          </a:ln>
+          <a:effectLst/>
+        </p:spPr>
+        <p:style>
+          <a:lnRef idx="1">
+            <a:schemeClr val="accent1"/>
+          </a:lnRef>
+          <a:fillRef idx="3">
+            <a:schemeClr val="accent1"/>
+          </a:fillRef>
+          <a:effectRef idx="2">
+            <a:schemeClr val="accent1"/>
+          </a:effectRef>
+          <a:fontRef idx="minor">
+            <a:schemeClr val="lt1"/>
+          </a:fontRef>
+        </p:style>
+        <p:txBody>
+          <a:bodyPr rtlCol="0" anchor="ctr"/>
+          <a:lstStyle/>
+          <a:p>
+            <a:pPr algn="ctr"/>
+          </a:p>
+        </p:txBody>
+      </p:sp>
+      <p:sp>
+        <p:nvSpPr>
+          <p:cNvPr id="65" name="TextBox 64"/>
           <p:cNvSpPr txBox="1"/>
           <p:nvPr/>
         </p:nvSpPr>
         <p:spPr>
           <a:xfrm>
-            <a:off x="742950" y="5257800"/>
-            <a:ext cx="914400" cy="152400"/>
+            <a:off x="1809750" y="5924550"/>
+            <a:ext cx="666750" cy="133350"/>
           </a:xfrm>
           <a:prstGeom prst="rect">
             <a:avLst/>
@@ -8146,33 +8803,33 @@
               </a:lnSpc>
             </a:pPr>
             <a:r>
-              <a:rPr sz="1050" b="0">
+              <a:rPr sz="950" b="0">
                 <a:solidFill>
-                  <a:srgbClr val="182238"/>
+                  <a:srgbClr val="667085"/>
                 </a:solidFill>
                 <a:latin typeface="Aptos"/>
               </a:rPr>
-              <a:t>Dia</a:t>
-            </a:r>
-          </a:p>
-        </p:txBody>
-      </p:sp>
-      <p:sp>
-        <p:nvSpPr>
-          <p:cNvPr id="52" name="Rectangle 51"/>
+              <a:t>dia útil</a:t>
+            </a:r>
+          </a:p>
+        </p:txBody>
+      </p:sp>
+      <p:sp>
+        <p:nvSpPr>
+          <p:cNvPr id="66" name="Rectangle 65"/>
           <p:cNvSpPr/>
           <p:nvPr/>
         </p:nvSpPr>
         <p:spPr>
           <a:xfrm>
-            <a:off x="1733550" y="5276850"/>
-            <a:ext cx="4476750" cy="123825"/>
+            <a:off x="2419350" y="5943600"/>
+            <a:ext cx="104775" cy="104775"/>
           </a:xfrm>
           <a:prstGeom prst="rect">
             <a:avLst/>
           </a:prstGeom>
           <a:solidFill>
-            <a:srgbClr val="E7EDF5"/>
+            <a:srgbClr val="13853A"/>
           </a:solidFill>
           <a:ln>
             <a:noFill/>
@@ -8203,58 +8860,14 @@
       </p:sp>
       <p:sp>
         <p:nvSpPr>
-          <p:cNvPr id="53" name="Rectangle 52"/>
-          <p:cNvSpPr/>
-          <p:nvPr/>
-        </p:nvSpPr>
-        <p:spPr>
-          <a:xfrm>
-            <a:off x="1733550" y="5276850"/>
-            <a:ext cx="1435566" cy="123825"/>
-          </a:xfrm>
-          <a:prstGeom prst="rect">
-            <a:avLst/>
-          </a:prstGeom>
-          <a:solidFill>
-            <a:srgbClr val="1476C9"/>
-          </a:solidFill>
-          <a:ln>
-            <a:noFill/>
-          </a:ln>
-          <a:effectLst/>
-        </p:spPr>
-        <p:style>
-          <a:lnRef idx="1">
-            <a:schemeClr val="accent1"/>
-          </a:lnRef>
-          <a:fillRef idx="3">
-            <a:schemeClr val="accent1"/>
-          </a:fillRef>
-          <a:effectRef idx="2">
-            <a:schemeClr val="accent1"/>
-          </a:effectRef>
-          <a:fontRef idx="minor">
-            <a:schemeClr val="lt1"/>
-          </a:fontRef>
-        </p:style>
-        <p:txBody>
-          <a:bodyPr rtlCol="0" anchor="ctr"/>
-          <a:lstStyle/>
-          <a:p>
-            <a:pPr algn="ctr"/>
-          </a:p>
-        </p:txBody>
-      </p:sp>
-      <p:sp>
-        <p:nvSpPr>
-          <p:cNvPr id="54" name="TextBox 53"/>
+          <p:cNvPr id="67" name="TextBox 66"/>
           <p:cNvSpPr txBox="1"/>
           <p:nvPr/>
         </p:nvSpPr>
         <p:spPr>
           <a:xfrm>
-            <a:off x="6286500" y="5257800"/>
-            <a:ext cx="666750" cy="152400"/>
+            <a:off x="2571750" y="5924550"/>
+            <a:ext cx="1047750" cy="133350"/>
           </a:xfrm>
           <a:prstGeom prst="rect">
             <a:avLst/>
@@ -8273,271 +8886,27 @@
               </a:lnSpc>
             </a:pPr>
             <a:r>
-              <a:rPr sz="1100" b="1">
-                <a:solidFill>
-                  <a:srgbClr val="182238"/>
-                </a:solidFill>
-                <a:latin typeface="Aptos"/>
-              </a:rPr>
-              <a:t>251 h</a:t>
-            </a:r>
-          </a:p>
-        </p:txBody>
-      </p:sp>
-      <p:sp>
-        <p:nvSpPr>
-          <p:cNvPr id="55" name="TextBox 54"/>
-          <p:cNvSpPr txBox="1"/>
-          <p:nvPr/>
-        </p:nvSpPr>
-        <p:spPr>
-          <a:xfrm>
-            <a:off x="7124700" y="5257800"/>
-            <a:ext cx="666750" cy="152400"/>
-          </a:xfrm>
-          <a:prstGeom prst="rect">
-            <a:avLst/>
-          </a:prstGeom>
-          <a:noFill/>
-        </p:spPr>
-        <p:txBody>
-          <a:bodyPr wrap="square" anchor="t" lIns="0" rIns="0" tIns="0" bIns="0">
-            <a:spAutoFit/>
-          </a:bodyPr>
-          <a:lstStyle/>
-          <a:p>
-            <a:pPr algn="l">
-              <a:lnSpc>
-                <a:spcPct val="106000"/>
-              </a:lnSpc>
-            </a:pPr>
-            <a:r>
-              <a:rPr sz="1050" b="1">
+              <a:rPr sz="950" b="0">
                 <a:solidFill>
                   <a:srgbClr val="667085"/>
                 </a:solidFill>
                 <a:latin typeface="Aptos"/>
               </a:rPr>
-              <a:t>14%</a:t>
-            </a:r>
-          </a:p>
-        </p:txBody>
-      </p:sp>
-      <p:sp>
-        <p:nvSpPr>
-          <p:cNvPr id="56" name="TextBox 55"/>
-          <p:cNvSpPr txBox="1"/>
-          <p:nvPr/>
-        </p:nvSpPr>
-        <p:spPr>
-          <a:xfrm>
-            <a:off x="742950" y="5581650"/>
-            <a:ext cx="914400" cy="152400"/>
-          </a:xfrm>
-          <a:prstGeom prst="rect">
-            <a:avLst/>
-          </a:prstGeom>
-          <a:noFill/>
-        </p:spPr>
-        <p:txBody>
-          <a:bodyPr wrap="square" anchor="t" lIns="0" rIns="0" tIns="0" bIns="0">
-            <a:spAutoFit/>
-          </a:bodyPr>
-          <a:lstStyle/>
-          <a:p>
-            <a:pPr algn="l">
-              <a:lnSpc>
-                <a:spcPct val="106000"/>
-              </a:lnSpc>
-            </a:pPr>
-            <a:r>
-              <a:rPr sz="1050" b="0">
-                <a:solidFill>
-                  <a:srgbClr val="182238"/>
-                </a:solidFill>
-                <a:latin typeface="Aptos"/>
-              </a:rPr>
-              <a:t>Madrugada</a:t>
-            </a:r>
-          </a:p>
-        </p:txBody>
-      </p:sp>
-      <p:sp>
-        <p:nvSpPr>
-          <p:cNvPr id="57" name="Rectangle 56"/>
+              <a:t>fim de semana</a:t>
+            </a:r>
+          </a:p>
+        </p:txBody>
+      </p:sp>
+      <p:sp>
+        <p:nvSpPr>
+          <p:cNvPr id="68" name="Rounded Rectangle 67"/>
           <p:cNvSpPr/>
           <p:nvPr/>
         </p:nvSpPr>
         <p:spPr>
           <a:xfrm>
-            <a:off x="1733550" y="5600700"/>
-            <a:ext cx="4476750" cy="123825"/>
-          </a:xfrm>
-          <a:prstGeom prst="rect">
-            <a:avLst/>
-          </a:prstGeom>
-          <a:solidFill>
-            <a:srgbClr val="E7EDF5"/>
-          </a:solidFill>
-          <a:ln>
-            <a:noFill/>
-          </a:ln>
-          <a:effectLst/>
-        </p:spPr>
-        <p:style>
-          <a:lnRef idx="1">
-            <a:schemeClr val="accent1"/>
-          </a:lnRef>
-          <a:fillRef idx="3">
-            <a:schemeClr val="accent1"/>
-          </a:fillRef>
-          <a:effectRef idx="2">
-            <a:schemeClr val="accent1"/>
-          </a:effectRef>
-          <a:fontRef idx="minor">
-            <a:schemeClr val="lt1"/>
-          </a:fontRef>
-        </p:style>
-        <p:txBody>
-          <a:bodyPr rtlCol="0" anchor="ctr"/>
-          <a:lstStyle/>
-          <a:p>
-            <a:pPr algn="ctr"/>
-          </a:p>
-        </p:txBody>
-      </p:sp>
-      <p:sp>
-        <p:nvSpPr>
-          <p:cNvPr id="58" name="Rectangle 57"/>
-          <p:cNvSpPr/>
-          <p:nvPr/>
-        </p:nvSpPr>
-        <p:spPr>
-          <a:xfrm>
-            <a:off x="1733550" y="5600700"/>
-            <a:ext cx="1316444" cy="123825"/>
-          </a:xfrm>
-          <a:prstGeom prst="rect">
-            <a:avLst/>
-          </a:prstGeom>
-          <a:solidFill>
-            <a:srgbClr val="1476C9"/>
-          </a:solidFill>
-          <a:ln>
-            <a:noFill/>
-          </a:ln>
-          <a:effectLst/>
-        </p:spPr>
-        <p:style>
-          <a:lnRef idx="1">
-            <a:schemeClr val="accent1"/>
-          </a:lnRef>
-          <a:fillRef idx="3">
-            <a:schemeClr val="accent1"/>
-          </a:fillRef>
-          <a:effectRef idx="2">
-            <a:schemeClr val="accent1"/>
-          </a:effectRef>
-          <a:fontRef idx="minor">
-            <a:schemeClr val="lt1"/>
-          </a:fontRef>
-        </p:style>
-        <p:txBody>
-          <a:bodyPr rtlCol="0" anchor="ctr"/>
-          <a:lstStyle/>
-          <a:p>
-            <a:pPr algn="ctr"/>
-          </a:p>
-        </p:txBody>
-      </p:sp>
-      <p:sp>
-        <p:nvSpPr>
-          <p:cNvPr id="59" name="TextBox 58"/>
-          <p:cNvSpPr txBox="1"/>
-          <p:nvPr/>
-        </p:nvSpPr>
-        <p:spPr>
-          <a:xfrm>
-            <a:off x="6286500" y="5581650"/>
-            <a:ext cx="666750" cy="152400"/>
-          </a:xfrm>
-          <a:prstGeom prst="rect">
-            <a:avLst/>
-          </a:prstGeom>
-          <a:noFill/>
-        </p:spPr>
-        <p:txBody>
-          <a:bodyPr wrap="square" anchor="t" lIns="0" rIns="0" tIns="0" bIns="0">
-            <a:spAutoFit/>
-          </a:bodyPr>
-          <a:lstStyle/>
-          <a:p>
-            <a:pPr algn="l">
-              <a:lnSpc>
-                <a:spcPct val="106000"/>
-              </a:lnSpc>
-            </a:pPr>
-            <a:r>
-              <a:rPr sz="1100" b="1">
-                <a:solidFill>
-                  <a:srgbClr val="182238"/>
-                </a:solidFill>
-                <a:latin typeface="Aptos"/>
-              </a:rPr>
-              <a:t>230 h</a:t>
-            </a:r>
-          </a:p>
-        </p:txBody>
-      </p:sp>
-      <p:sp>
-        <p:nvSpPr>
-          <p:cNvPr id="60" name="TextBox 59"/>
-          <p:cNvSpPr txBox="1"/>
-          <p:nvPr/>
-        </p:nvSpPr>
-        <p:spPr>
-          <a:xfrm>
-            <a:off x="7124700" y="5581650"/>
-            <a:ext cx="666750" cy="152400"/>
-          </a:xfrm>
-          <a:prstGeom prst="rect">
-            <a:avLst/>
-          </a:prstGeom>
-          <a:noFill/>
-        </p:spPr>
-        <p:txBody>
-          <a:bodyPr wrap="square" anchor="t" lIns="0" rIns="0" tIns="0" bIns="0">
-            <a:spAutoFit/>
-          </a:bodyPr>
-          <a:lstStyle/>
-          <a:p>
-            <a:pPr algn="l">
-              <a:lnSpc>
-                <a:spcPct val="106000"/>
-              </a:lnSpc>
-            </a:pPr>
-            <a:r>
-              <a:rPr sz="1050" b="1">
-                <a:solidFill>
-                  <a:srgbClr val="667085"/>
-                </a:solidFill>
-                <a:latin typeface="Aptos"/>
-              </a:rPr>
-              <a:t>13%</a:t>
-            </a:r>
-          </a:p>
-        </p:txBody>
-      </p:sp>
-      <p:sp>
-        <p:nvSpPr>
-          <p:cNvPr id="61" name="Rounded Rectangle 60"/>
-          <p:cNvSpPr/>
-          <p:nvPr/>
-        </p:nvSpPr>
-        <p:spPr>
-          <a:xfrm>
-            <a:off x="8858250" y="4629150"/>
-            <a:ext cx="2552700" cy="1238250"/>
+            <a:off x="8096250" y="4572000"/>
+            <a:ext cx="3314700" cy="1428750"/>
           </a:xfrm>
           <a:prstGeom prst="roundRect">
             <a:avLst>
@@ -8576,14 +8945,14 @@
       </p:sp>
       <p:sp>
         <p:nvSpPr>
-          <p:cNvPr id="62" name="TextBox 61"/>
+          <p:cNvPr id="69" name="TextBox 68"/>
           <p:cNvSpPr txBox="1"/>
           <p:nvPr/>
         </p:nvSpPr>
         <p:spPr>
           <a:xfrm>
-            <a:off x="9048750" y="4743450"/>
-            <a:ext cx="2190750" cy="133350"/>
+            <a:off x="8286750" y="4667250"/>
+            <a:ext cx="2952750" cy="133350"/>
           </a:xfrm>
           <a:prstGeom prst="rect">
             <a:avLst/>
@@ -8608,21 +8977,21 @@
                 </a:solidFill>
                 <a:latin typeface="Aptos"/>
               </a:rPr>
-              <a:t>POR QUE IMPORTA</a:t>
-            </a:r>
-          </a:p>
-        </p:txBody>
-      </p:sp>
-      <p:sp>
-        <p:nvSpPr>
-          <p:cNvPr id="63" name="TextBox 62"/>
+              <a:t>DOIS REGIMES, DUAS SOLUÇÕES</a:t>
+            </a:r>
+          </a:p>
+        </p:txBody>
+      </p:sp>
+      <p:sp>
+        <p:nvSpPr>
+          <p:cNvPr id="70" name="TextBox 69"/>
           <p:cNvSpPr txBox="1"/>
           <p:nvPr/>
         </p:nvSpPr>
         <p:spPr>
           <a:xfrm>
-            <a:off x="9048750" y="4914900"/>
-            <a:ext cx="2209800" cy="914400"/>
+            <a:off x="8286750" y="4838700"/>
+            <a:ext cx="2971800" cy="1104900"/>
           </a:xfrm>
           <a:prstGeom prst="rect">
             <a:avLst/>
@@ -8637,17 +9006,17 @@
           <a:p>
             <a:pPr algn="l">
               <a:lnSpc>
-                <a:spcPct val="108000"/>
+                <a:spcPct val="107000"/>
               </a:lnSpc>
             </a:pPr>
             <a:r>
-              <a:rPr sz="1050" b="0">
+              <a:rPr sz="1000" b="0">
                 <a:solidFill>
                   <a:srgbClr val="182238"/>
                 </a:solidFill>
                 <a:latin typeface="Aptos"/>
               </a:rPr>
-              <a:t>A cada dia há em média 36,2 técnicos de sobreaviso e apenas 16,6 são acionados (46%). Em horas, são 6.777 h pagas em espera para 1.765 h de acionamento efetivo. Redimensionar a escala pela demanda real é o maior lever de custo.</a:t>
+              <a:t>No dia útil o acionamento é noturno (887 h pós-jornada). No fim de semana é diurno (695 h), porque não há escala regular de sáb/dom — 46% das horas acionadas caem no FDS, pagas com adicional maior. Plantão noturno e cobertura de FDS são problemas diferentes, com soluções diferentes.</a:t>
             </a:r>
           </a:p>
         </p:txBody>
@@ -8909,7 +9278,7 @@
                 </a:solidFill>
                 <a:latin typeface="Aptos"/>
               </a:rPr>
-              <a:t>3 / 4</a:t>
+              <a:t>3 / 5</a:t>
             </a:r>
           </a:p>
         </p:txBody>
@@ -8987,7 +9356,7 @@
                 </a:solidFill>
                 <a:latin typeface="Aptos Display"/>
               </a:rPr>
-              <a:t>O custo de sobreaviso está concentrado em poucas áreas — a recuperação começa por elas</a:t>
+              <a:t>Três áreas acionam todo dia: isso não é contingência, é operação regular paga como HE</a:t>
             </a:r>
           </a:p>
         </p:txBody>
@@ -10364,8 +10733,8 @@
         </p:nvSpPr>
         <p:spPr>
           <a:xfrm>
-            <a:off x="6877050" y="2286000"/>
-            <a:ext cx="4572000" cy="476250"/>
+            <a:off x="6877050" y="2266950"/>
+            <a:ext cx="4572000" cy="533400"/>
           </a:xfrm>
           <a:prstGeom prst="rect">
             <a:avLst/>
@@ -10384,13 +10753,13 @@
               </a:lnSpc>
             </a:pPr>
             <a:r>
-              <a:rPr sz="1200" b="0">
+              <a:rPr sz="1100" b="0">
                 <a:solidFill>
                   <a:srgbClr val="FFFFFF"/>
                 </a:solidFill>
                 <a:latin typeface="Aptos"/>
               </a:rPr>
-              <a:t>As 3 primeiras GAs concentram 89% de todas as horas de sobreaviso da regional. Não é problema difuso: é onde a escala precisa ser revista primeiro.</a:t>
+              <a:t>As 3 primeiras GAs concentram 89% das horas — e acionam em 96–100% dos dias. Sobreaviso é para evento eventual; demanda diária pede turno fixo.</a:t>
             </a:r>
           </a:p>
         </p:txBody>
@@ -10414,10 +10783,10 @@
                 <a:tableStyleId>{5C22544A-7EE6-4342-B048-85BDC9FD1C3A}</a:tableStyleId>
               </a:tblPr>
               <a:tblGrid>
-                <a:gridCol w="2190750"/>
-                <a:gridCol w="838200"/>
-                <a:gridCol w="952500"/>
-                <a:gridCol w="990600"/>
+                <a:gridCol w="1943100"/>
+                <a:gridCol w="1066800"/>
+                <a:gridCol w="914400"/>
+                <a:gridCol w="1047750"/>
               </a:tblGrid>
               <a:tr h="408214">
                 <a:tc>
@@ -10464,7 +10833,7 @@
                           </a:solidFill>
                           <a:latin typeface="Aptos"/>
                         </a:rPr>
-                        <a:t>Técnicos</a:t>
+                        <a:t>Aciona em</a:t>
                       </a:r>
                     </a:p>
                   </a:txBody>
@@ -10491,7 +10860,7 @@
                           </a:solidFill>
                           <a:latin typeface="Aptos"/>
                         </a:rPr>
-                        <a:t>Horas</a:t>
+                        <a:t>Custo</a:t>
                       </a:r>
                     </a:p>
                   </a:txBody>
@@ -10518,7 +10887,7 @@
                           </a:solidFill>
                           <a:latin typeface="Aptos"/>
                         </a:rPr>
-                        <a:t>% acion.</a:t>
+                        <a:t>Padrão</a:t>
                       </a:r>
                     </a:p>
                   </a:txBody>
@@ -10568,40 +10937,13 @@
                         </a:lnSpc>
                       </a:pPr>
                       <a:r>
-                        <a:rPr sz="1050" b="0">
-                          <a:solidFill>
-                            <a:srgbClr val="182238"/>
-                          </a:solidFill>
-                          <a:latin typeface="Aptos"/>
-                        </a:rPr>
-                        <a:t>32</a:t>
-                      </a:r>
-                    </a:p>
-                  </a:txBody>
-                  <a:tcPr anchor="ctr" marL="85725" marR="76200" marT="47625" marB="47625">
-                    <a:solidFill>
-                      <a:srgbClr val="FFFFFF"/>
-                    </a:solidFill>
-                  </a:tcPr>
-                </a:tc>
-                <a:tc>
-                  <a:txBody>
-                    <a:bodyPr wrap="square"/>
-                    <a:lstStyle/>
-                    <a:p>
-                      <a:pPr algn="ctr">
-                        <a:lnSpc>
-                          <a:spcPct val="104000"/>
-                        </a:lnSpc>
-                      </a:pPr>
-                      <a:r>
                         <a:rPr sz="1050" b="1">
                           <a:solidFill>
                             <a:srgbClr val="182238"/>
                           </a:solidFill>
                           <a:latin typeface="Aptos"/>
                         </a:rPr>
-                        <a:t>3727 h</a:t>
+                        <a:t>25 de 25 d</a:t>
                       </a:r>
                     </a:p>
                   </a:txBody>
@@ -10624,11 +10966,38 @@
                       <a:r>
                         <a:rPr sz="1050" b="0">
                           <a:solidFill>
+                            <a:srgbClr val="182238"/>
+                          </a:solidFill>
+                          <a:latin typeface="Aptos"/>
+                        </a:rPr>
+                        <a:t>R$ 30,1 mil</a:t>
+                      </a:r>
+                    </a:p>
+                  </a:txBody>
+                  <a:tcPr anchor="ctr" marL="85725" marR="76200" marT="47625" marB="47625">
+                    <a:solidFill>
+                      <a:srgbClr val="FFFFFF"/>
+                    </a:solidFill>
+                  </a:tcPr>
+                </a:tc>
+                <a:tc>
+                  <a:txBody>
+                    <a:bodyPr wrap="square"/>
+                    <a:lstStyle/>
+                    <a:p>
+                      <a:pPr algn="ctr">
+                        <a:lnSpc>
+                          <a:spcPct val="104000"/>
+                        </a:lnSpc>
+                      </a:pPr>
+                      <a:r>
+                        <a:rPr sz="950" b="1">
+                          <a:solidFill>
                             <a:srgbClr val="D94545"/>
                           </a:solidFill>
                           <a:latin typeface="Aptos"/>
                         </a:rPr>
-                        <a:t>22%</a:t>
+                        <a:t>TODO DIA</a:t>
                       </a:r>
                     </a:p>
                   </a:txBody>
@@ -10657,7 +11026,34 @@
                           </a:solidFill>
                           <a:latin typeface="Aptos"/>
                         </a:rPr>
-                        <a:t>Claudio De Sousa</a:t>
+                        <a:t>Rafael Nunes</a:t>
+                      </a:r>
+                    </a:p>
+                  </a:txBody>
+                  <a:tcPr anchor="ctr" marL="85725" marR="76200" marT="47625" marB="47625">
+                    <a:solidFill>
+                      <a:srgbClr val="F3F6FA"/>
+                    </a:solidFill>
+                  </a:tcPr>
+                </a:tc>
+                <a:tc>
+                  <a:txBody>
+                    <a:bodyPr wrap="square"/>
+                    <a:lstStyle/>
+                    <a:p>
+                      <a:pPr algn="ctr">
+                        <a:lnSpc>
+                          <a:spcPct val="104000"/>
+                        </a:lnSpc>
+                      </a:pPr>
+                      <a:r>
+                        <a:rPr sz="1050" b="1">
+                          <a:solidFill>
+                            <a:srgbClr val="182238"/>
+                          </a:solidFill>
+                          <a:latin typeface="Aptos"/>
+                        </a:rPr>
+                        <a:t>25 de 25 d</a:t>
                       </a:r>
                     </a:p>
                   </a:txBody>
@@ -10684,7 +11080,7 @@
                           </a:solidFill>
                           <a:latin typeface="Aptos"/>
                         </a:rPr>
-                        <a:t>11</a:t>
+                        <a:t>R$ 16,3 mil</a:t>
                       </a:r>
                     </a:p>
                   </a:txBody>
@@ -10705,40 +11101,13 @@
                         </a:lnSpc>
                       </a:pPr>
                       <a:r>
-                        <a:rPr sz="1050" b="1">
-                          <a:solidFill>
-                            <a:srgbClr val="182238"/>
-                          </a:solidFill>
-                          <a:latin typeface="Aptos"/>
-                        </a:rPr>
-                        <a:t>1970 h</a:t>
-                      </a:r>
-                    </a:p>
-                  </a:txBody>
-                  <a:tcPr anchor="ctr" marL="85725" marR="76200" marT="47625" marB="47625">
-                    <a:solidFill>
-                      <a:srgbClr val="F3F6FA"/>
-                    </a:solidFill>
-                  </a:tcPr>
-                </a:tc>
-                <a:tc>
-                  <a:txBody>
-                    <a:bodyPr wrap="square"/>
-                    <a:lstStyle/>
-                    <a:p>
-                      <a:pPr algn="ctr">
-                        <a:lnSpc>
-                          <a:spcPct val="104000"/>
-                        </a:lnSpc>
-                      </a:pPr>
-                      <a:r>
-                        <a:rPr sz="1050" b="0">
+                        <a:rPr sz="950" b="1">
                           <a:solidFill>
                             <a:srgbClr val="D94545"/>
                           </a:solidFill>
                           <a:latin typeface="Aptos"/>
                         </a:rPr>
-                        <a:t>14%</a:t>
+                        <a:t>TODO DIA</a:t>
                       </a:r>
                     </a:p>
                   </a:txBody>
@@ -10767,7 +11136,34 @@
                           </a:solidFill>
                           <a:latin typeface="Aptos"/>
                         </a:rPr>
-                        <a:t>Rafael Nunes</a:t>
+                        <a:t>Claudio De Sousa</a:t>
+                      </a:r>
+                    </a:p>
+                  </a:txBody>
+                  <a:tcPr anchor="ctr" marL="85725" marR="76200" marT="47625" marB="47625">
+                    <a:solidFill>
+                      <a:srgbClr val="FFFFFF"/>
+                    </a:solidFill>
+                  </a:tcPr>
+                </a:tc>
+                <a:tc>
+                  <a:txBody>
+                    <a:bodyPr wrap="square"/>
+                    <a:lstStyle/>
+                    <a:p>
+                      <a:pPr algn="ctr">
+                        <a:lnSpc>
+                          <a:spcPct val="104000"/>
+                        </a:lnSpc>
+                      </a:pPr>
+                      <a:r>
+                        <a:rPr sz="1050" b="1">
+                          <a:solidFill>
+                            <a:srgbClr val="182238"/>
+                          </a:solidFill>
+                          <a:latin typeface="Aptos"/>
+                        </a:rPr>
+                        <a:t>24 de 25 d</a:t>
                       </a:r>
                     </a:p>
                   </a:txBody>
@@ -10794,7 +11190,7 @@
                           </a:solidFill>
                           <a:latin typeface="Aptos"/>
                         </a:rPr>
-                        <a:t>16</a:t>
+                        <a:t>R$ 12,4 mil</a:t>
                       </a:r>
                     </a:p>
                   </a:txBody>
@@ -10815,40 +11211,13 @@
                         </a:lnSpc>
                       </a:pPr>
                       <a:r>
-                        <a:rPr sz="1050" b="1">
-                          <a:solidFill>
-                            <a:srgbClr val="182238"/>
-                          </a:solidFill>
-                          <a:latin typeface="Aptos"/>
-                        </a:rPr>
-                        <a:t>1884 h</a:t>
-                      </a:r>
-                    </a:p>
-                  </a:txBody>
-                  <a:tcPr anchor="ctr" marL="85725" marR="76200" marT="47625" marB="47625">
-                    <a:solidFill>
-                      <a:srgbClr val="FFFFFF"/>
-                    </a:solidFill>
-                  </a:tcPr>
-                </a:tc>
-                <a:tc>
-                  <a:txBody>
-                    <a:bodyPr wrap="square"/>
-                    <a:lstStyle/>
-                    <a:p>
-                      <a:pPr algn="ctr">
-                        <a:lnSpc>
-                          <a:spcPct val="104000"/>
-                        </a:lnSpc>
-                      </a:pPr>
-                      <a:r>
-                        <a:rPr sz="1050" b="0">
+                        <a:rPr sz="950" b="1">
                           <a:solidFill>
                             <a:srgbClr val="D94545"/>
                           </a:solidFill>
                           <a:latin typeface="Aptos"/>
                         </a:rPr>
-                        <a:t>29%</a:t>
+                        <a:t>TODO DIA</a:t>
                       </a:r>
                     </a:p>
                   </a:txBody>
@@ -10877,7 +11246,34 @@
                           </a:solidFill>
                           <a:latin typeface="Aptos"/>
                         </a:rPr>
-                        <a:t>Dejamir Sousa Silva</a:t>
+                        <a:t>Wagner Da Luz</a:t>
+                      </a:r>
+                    </a:p>
+                  </a:txBody>
+                  <a:tcPr anchor="ctr" marL="85725" marR="76200" marT="47625" marB="47625">
+                    <a:solidFill>
+                      <a:srgbClr val="F3F6FA"/>
+                    </a:solidFill>
+                  </a:tcPr>
+                </a:tc>
+                <a:tc>
+                  <a:txBody>
+                    <a:bodyPr wrap="square"/>
+                    <a:lstStyle/>
+                    <a:p>
+                      <a:pPr algn="ctr">
+                        <a:lnSpc>
+                          <a:spcPct val="104000"/>
+                        </a:lnSpc>
+                      </a:pPr>
+                      <a:r>
+                        <a:rPr sz="1050" b="1">
+                          <a:solidFill>
+                            <a:srgbClr val="182238"/>
+                          </a:solidFill>
+                          <a:latin typeface="Aptos"/>
+                        </a:rPr>
+                        <a:t>8 de 24 d</a:t>
                       </a:r>
                     </a:p>
                   </a:txBody>
@@ -10904,7 +11300,7 @@
                           </a:solidFill>
                           <a:latin typeface="Aptos"/>
                         </a:rPr>
-                        <a:t>2</a:t>
+                        <a:t>R$ 2,6 mil</a:t>
                       </a:r>
                     </a:p>
                   </a:txBody>
@@ -10925,40 +11321,13 @@
                         </a:lnSpc>
                       </a:pPr>
                       <a:r>
-                        <a:rPr sz="1050" b="1">
+                        <a:rPr sz="950" b="1">
                           <a:solidFill>
-                            <a:srgbClr val="182238"/>
+                            <a:srgbClr val="13853A"/>
                           </a:solidFill>
                           <a:latin typeface="Aptos"/>
                         </a:rPr>
-                        <a:t>504 h</a:t>
-                      </a:r>
-                    </a:p>
-                  </a:txBody>
-                  <a:tcPr anchor="ctr" marL="85725" marR="76200" marT="47625" marB="47625">
-                    <a:solidFill>
-                      <a:srgbClr val="F3F6FA"/>
-                    </a:solidFill>
-                  </a:tcPr>
-                </a:tc>
-                <a:tc>
-                  <a:txBody>
-                    <a:bodyPr wrap="square"/>
-                    <a:lstStyle/>
-                    <a:p>
-                      <a:pPr algn="ctr">
-                        <a:lnSpc>
-                          <a:spcPct val="104000"/>
-                        </a:lnSpc>
-                      </a:pPr>
-                      <a:r>
-                        <a:rPr sz="1050" b="0">
-                          <a:solidFill>
-                            <a:srgbClr val="D94545"/>
-                          </a:solidFill>
-                          <a:latin typeface="Aptos"/>
-                        </a:rPr>
-                        <a:t>6%</a:t>
+                        <a:t>EVENTUAL</a:t>
                       </a:r>
                     </a:p>
                   </a:txBody>
@@ -10987,7 +11356,34 @@
                           </a:solidFill>
                           <a:latin typeface="Aptos"/>
                         </a:rPr>
-                        <a:t>Wagner Da Luz</a:t>
+                        <a:t>Dejamir Sousa Silva</a:t>
+                      </a:r>
+                    </a:p>
+                  </a:txBody>
+                  <a:tcPr anchor="ctr" marL="85725" marR="76200" marT="47625" marB="47625">
+                    <a:solidFill>
+                      <a:srgbClr val="FFFFFF"/>
+                    </a:solidFill>
+                  </a:tcPr>
+                </a:tc>
+                <a:tc>
+                  <a:txBody>
+                    <a:bodyPr wrap="square"/>
+                    <a:lstStyle/>
+                    <a:p>
+                      <a:pPr algn="ctr">
+                        <a:lnSpc>
+                          <a:spcPct val="104000"/>
+                        </a:lnSpc>
+                      </a:pPr>
+                      <a:r>
+                        <a:rPr sz="1050" b="1">
+                          <a:solidFill>
+                            <a:srgbClr val="182238"/>
+                          </a:solidFill>
+                          <a:latin typeface="Aptos"/>
+                        </a:rPr>
+                        <a:t>7 de 25 d</a:t>
                       </a:r>
                     </a:p>
                   </a:txBody>
@@ -11014,7 +11410,7 @@
                           </a:solidFill>
                           <a:latin typeface="Aptos"/>
                         </a:rPr>
-                        <a:t>2</a:t>
+                        <a:t>R$ 2,5 mil</a:t>
                       </a:r>
                     </a:p>
                   </a:txBody>
@@ -11035,40 +11431,13 @@
                         </a:lnSpc>
                       </a:pPr>
                       <a:r>
-                        <a:rPr sz="1050" b="1">
+                        <a:rPr sz="950" b="1">
                           <a:solidFill>
-                            <a:srgbClr val="182238"/>
+                            <a:srgbClr val="13853A"/>
                           </a:solidFill>
                           <a:latin typeface="Aptos"/>
                         </a:rPr>
-                        <a:t>329 h</a:t>
-                      </a:r>
-                    </a:p>
-                  </a:txBody>
-                  <a:tcPr anchor="ctr" marL="85725" marR="76200" marT="47625" marB="47625">
-                    <a:solidFill>
-                      <a:srgbClr val="FFFFFF"/>
-                    </a:solidFill>
-                  </a:tcPr>
-                </a:tc>
-                <a:tc>
-                  <a:txBody>
-                    <a:bodyPr wrap="square"/>
-                    <a:lstStyle/>
-                    <a:p>
-                      <a:pPr algn="ctr">
-                        <a:lnSpc>
-                          <a:spcPct val="104000"/>
-                        </a:lnSpc>
-                      </a:pPr>
-                      <a:r>
-                        <a:rPr sz="1050" b="0">
-                          <a:solidFill>
-                            <a:srgbClr val="D94545"/>
-                          </a:solidFill>
-                          <a:latin typeface="Aptos"/>
-                        </a:rPr>
-                        <a:t>16%</a:t>
+                        <a:t>EVENTUAL</a:t>
                       </a:r>
                     </a:p>
                   </a:txBody>
@@ -11118,40 +11487,13 @@
                         </a:lnSpc>
                       </a:pPr>
                       <a:r>
-                        <a:rPr sz="1050" b="0">
-                          <a:solidFill>
-                            <a:srgbClr val="182238"/>
-                          </a:solidFill>
-                          <a:latin typeface="Aptos"/>
-                        </a:rPr>
-                        <a:t>2</a:t>
-                      </a:r>
-                    </a:p>
-                  </a:txBody>
-                  <a:tcPr anchor="ctr" marL="85725" marR="76200" marT="47625" marB="47625">
-                    <a:solidFill>
-                      <a:srgbClr val="F3F6FA"/>
-                    </a:solidFill>
-                  </a:tcPr>
-                </a:tc>
-                <a:tc>
-                  <a:txBody>
-                    <a:bodyPr wrap="square"/>
-                    <a:lstStyle/>
-                    <a:p>
-                      <a:pPr algn="ctr">
-                        <a:lnSpc>
-                          <a:spcPct val="104000"/>
-                        </a:lnSpc>
-                      </a:pPr>
-                      <a:r>
                         <a:rPr sz="1050" b="1">
                           <a:solidFill>
                             <a:srgbClr val="182238"/>
                           </a:solidFill>
                           <a:latin typeface="Aptos"/>
                         </a:rPr>
-                        <a:t>128 h</a:t>
+                        <a:t>10 de 21 d</a:t>
                       </a:r>
                     </a:p>
                   </a:txBody>
@@ -11174,11 +11516,38 @@
                       <a:r>
                         <a:rPr sz="1050" b="0">
                           <a:solidFill>
-                            <a:srgbClr val="D94545"/>
+                            <a:srgbClr val="182238"/>
                           </a:solidFill>
                           <a:latin typeface="Aptos"/>
                         </a:rPr>
-                        <a:t>27%</a:t>
+                        <a:t>R$ 1,3 mil</a:t>
+                      </a:r>
+                    </a:p>
+                  </a:txBody>
+                  <a:tcPr anchor="ctr" marL="85725" marR="76200" marT="47625" marB="47625">
+                    <a:solidFill>
+                      <a:srgbClr val="F3F6FA"/>
+                    </a:solidFill>
+                  </a:tcPr>
+                </a:tc>
+                <a:tc>
+                  <a:txBody>
+                    <a:bodyPr wrap="square"/>
+                    <a:lstStyle/>
+                    <a:p>
+                      <a:pPr algn="ctr">
+                        <a:lnSpc>
+                          <a:spcPct val="104000"/>
+                        </a:lnSpc>
+                      </a:pPr>
+                      <a:r>
+                        <a:rPr sz="950" b="1">
+                          <a:solidFill>
+                            <a:srgbClr val="9A6200"/>
+                          </a:solidFill>
+                          <a:latin typeface="Aptos"/>
+                        </a:rPr>
+                        <a:t>FREQUENTE</a:t>
                       </a:r>
                     </a:p>
                   </a:txBody>
@@ -11450,7 +11819,7 @@
                 </a:solidFill>
                 <a:latin typeface="Aptos"/>
               </a:rPr>
-              <a:t>4 / 4</a:t>
+              <a:t>4 / 5</a:t>
             </a:r>
           </a:p>
         </p:txBody>
@@ -11489,7 +11858,7 @@
                 </a:solidFill>
                 <a:latin typeface="Aptos"/>
               </a:rPr>
-              <a:t>PROPOSTA DO PRÓXIMO CICLO · FCA</a:t>
+              <a:t>RISCO × CUSTO-BENEFÍCIO</a:t>
             </a:r>
           </a:p>
         </p:txBody>
@@ -11528,21 +11897,1530 @@
                 </a:solidFill>
                 <a:latin typeface="Aptos Display"/>
               </a:rPr>
-              <a:t>Fechar o gap de R$ 42,4 mil/mês com três alavancas sobre a escala de sobreaviso</a:t>
-            </a:r>
-          </a:p>
-        </p:txBody>
-      </p:sp>
-      <p:sp>
-        <p:nvSpPr>
-          <p:cNvPr id="10" name="Rounded Rectangle 9"/>
+              <a:t>Trocar o instrumento sem perder cobertura: turno fixo onde a demanda é diária</a:t>
+            </a:r>
+          </a:p>
+        </p:txBody>
+      </p:sp>
+      <p:sp>
+        <p:nvSpPr>
+          <p:cNvPr id="10" name="TextBox 9"/>
+          <p:cNvSpPr txBox="1"/>
+          <p:nvPr/>
+        </p:nvSpPr>
+        <p:spPr>
+          <a:xfrm>
+            <a:off x="533400" y="1447800"/>
+            <a:ext cx="6286500" cy="171450"/>
+          </a:xfrm>
+          <a:prstGeom prst="rect">
+            <a:avLst/>
+          </a:prstGeom>
+          <a:noFill/>
+        </p:spPr>
+        <p:txBody>
+          <a:bodyPr wrap="square" anchor="t" lIns="0" rIns="0" tIns="0" bIns="0">
+            <a:spAutoFit/>
+          </a:bodyPr>
+          <a:lstStyle/>
+          <a:p>
+            <a:pPr algn="l">
+              <a:lnSpc>
+                <a:spcPct val="106000"/>
+              </a:lnSpc>
+            </a:pPr>
+            <a:r>
+              <a:rPr sz="1300" b="1">
+                <a:solidFill>
+                  <a:srgbClr val="081551"/>
+                </a:solidFill>
+                <a:latin typeface="Aptos"/>
+              </a:rPr>
+              <a:t>Dimensionamento seguro por GA — plantão hoje × demanda real de acionados</a:t>
+            </a:r>
+          </a:p>
+        </p:txBody>
+      </p:sp>
+      <p:sp>
+        <p:nvSpPr>
+          <p:cNvPr id="11" name="TextBox 10"/>
+          <p:cNvSpPr txBox="1"/>
+          <p:nvPr/>
+        </p:nvSpPr>
+        <p:spPr>
+          <a:xfrm>
+            <a:off x="533400" y="1657350"/>
+            <a:ext cx="6286500" cy="152400"/>
+          </a:xfrm>
+          <a:prstGeom prst="rect">
+            <a:avLst/>
+          </a:prstGeom>
+          <a:noFill/>
+        </p:spPr>
+        <p:txBody>
+          <a:bodyPr wrap="square" anchor="t" lIns="0" rIns="0" tIns="0" bIns="0">
+            <a:spAutoFit/>
+          </a:bodyPr>
+          <a:lstStyle/>
+          <a:p>
+            <a:pPr algn="l">
+              <a:lnSpc>
+                <a:spcPct val="106000"/>
+              </a:lnSpc>
+            </a:pPr>
+            <a:r>
+              <a:rPr sz="1000" b="0">
+                <a:solidFill>
+                  <a:srgbClr val="667085"/>
+                </a:solidFill>
+                <a:latin typeface="Aptos"/>
+              </a:rPr>
+              <a:t>Mediana e pico (p90/máx) de técnicos acionados no mesmo dia. A cobertura não cai: muda o instrumento.</a:t>
+            </a:r>
+          </a:p>
+        </p:txBody>
+      </p:sp>
+      <p:graphicFrame>
+        <p:nvGraphicFramePr>
+          <p:cNvPr id="12" name="Table 11"/>
+          <p:cNvGraphicFramePr>
+            <a:graphicFrameLocks noGrp="1"/>
+          </p:cNvGraphicFramePr>
+          <p:nvPr/>
+        </p:nvGraphicFramePr>
+        <p:xfrm>
+          <a:off x="533400" y="1905000"/>
+          <a:ext cx="6286500" cy="2857500"/>
+        </p:xfrm>
+        <a:graphic>
+          <a:graphicData uri="http://schemas.openxmlformats.org/drawingml/2006/table">
+            <a:tbl>
+              <a:tblPr>
+                <a:tableStyleId>{5C22544A-7EE6-4342-B048-85BDC9FD1C3A}</a:tableStyleId>
+              </a:tblPr>
+              <a:tblGrid>
+                <a:gridCol w="1809750"/>
+                <a:gridCol w="1009650"/>
+                <a:gridCol w="1123950"/>
+                <a:gridCol w="781050"/>
+                <a:gridCol w="1562100"/>
+              </a:tblGrid>
+              <a:tr h="408214">
+                <a:tc>
+                  <a:txBody>
+                    <a:bodyPr wrap="square"/>
+                    <a:lstStyle/>
+                    <a:p>
+                      <a:pPr algn="l">
+                        <a:lnSpc>
+                          <a:spcPct val="104000"/>
+                        </a:lnSpc>
+                      </a:pPr>
+                      <a:r>
+                        <a:rPr sz="1050" b="1">
+                          <a:solidFill>
+                            <a:srgbClr val="FFFFFF"/>
+                          </a:solidFill>
+                          <a:latin typeface="Aptos"/>
+                        </a:rPr>
+                        <a:t>GA</a:t>
+                      </a:r>
+                    </a:p>
+                  </a:txBody>
+                  <a:tcPr anchor="ctr" marL="85725" marR="76200" marT="47625" marB="47625">
+                    <a:solidFill>
+                      <a:srgbClr val="081551"/>
+                    </a:solidFill>
+                  </a:tcPr>
+                </a:tc>
+                <a:tc>
+                  <a:txBody>
+                    <a:bodyPr wrap="square"/>
+                    <a:lstStyle/>
+                    <a:p>
+                      <a:pPr algn="l">
+                        <a:lnSpc>
+                          <a:spcPct val="104000"/>
+                        </a:lnSpc>
+                      </a:pPr>
+                      <a:r>
+                        <a:rPr sz="1050" b="1">
+                          <a:solidFill>
+                            <a:srgbClr val="FFFFFF"/>
+                          </a:solidFill>
+                          <a:latin typeface="Aptos"/>
+                        </a:rPr>
+                        <a:t>Plantão hoje</a:t>
+                      </a:r>
+                    </a:p>
+                  </a:txBody>
+                  <a:tcPr anchor="ctr" marL="85725" marR="76200" marT="47625" marB="47625">
+                    <a:solidFill>
+                      <a:srgbClr val="081551"/>
+                    </a:solidFill>
+                  </a:tcPr>
+                </a:tc>
+                <a:tc>
+                  <a:txBody>
+                    <a:bodyPr wrap="square"/>
+                    <a:lstStyle/>
+                    <a:p>
+                      <a:pPr algn="l">
+                        <a:lnSpc>
+                          <a:spcPct val="104000"/>
+                        </a:lnSpc>
+                      </a:pPr>
+                      <a:r>
+                        <a:rPr sz="1050" b="1">
+                          <a:solidFill>
+                            <a:srgbClr val="FFFFFF"/>
+                          </a:solidFill>
+                          <a:latin typeface="Aptos"/>
+                        </a:rPr>
+                        <a:t>Acionados/dia</a:t>
+                      </a:r>
+                    </a:p>
+                  </a:txBody>
+                  <a:tcPr anchor="ctr" marL="85725" marR="76200" marT="47625" marB="47625">
+                    <a:solidFill>
+                      <a:srgbClr val="081551"/>
+                    </a:solidFill>
+                  </a:tcPr>
+                </a:tc>
+                <a:tc>
+                  <a:txBody>
+                    <a:bodyPr wrap="square"/>
+                    <a:lstStyle/>
+                    <a:p>
+                      <a:pPr algn="l">
+                        <a:lnSpc>
+                          <a:spcPct val="104000"/>
+                        </a:lnSpc>
+                      </a:pPr>
+                      <a:r>
+                        <a:rPr sz="1050" b="1">
+                          <a:solidFill>
+                            <a:srgbClr val="FFFFFF"/>
+                          </a:solidFill>
+                          <a:latin typeface="Aptos"/>
+                        </a:rPr>
+                        <a:t>Pico</a:t>
+                      </a:r>
+                    </a:p>
+                  </a:txBody>
+                  <a:tcPr anchor="ctr" marL="85725" marR="76200" marT="47625" marB="47625">
+                    <a:solidFill>
+                      <a:srgbClr val="081551"/>
+                    </a:solidFill>
+                  </a:tcPr>
+                </a:tc>
+                <a:tc>
+                  <a:txBody>
+                    <a:bodyPr wrap="square"/>
+                    <a:lstStyle/>
+                    <a:p>
+                      <a:pPr algn="l">
+                        <a:lnSpc>
+                          <a:spcPct val="104000"/>
+                        </a:lnSpc>
+                      </a:pPr>
+                      <a:r>
+                        <a:rPr sz="1050" b="1">
+                          <a:solidFill>
+                            <a:srgbClr val="FFFFFF"/>
+                          </a:solidFill>
+                          <a:latin typeface="Aptos"/>
+                        </a:rPr>
+                        <a:t>Proposta</a:t>
+                      </a:r>
+                    </a:p>
+                  </a:txBody>
+                  <a:tcPr anchor="ctr" marL="85725" marR="76200" marT="47625" marB="47625">
+                    <a:solidFill>
+                      <a:srgbClr val="081551"/>
+                    </a:solidFill>
+                  </a:tcPr>
+                </a:tc>
+              </a:tr>
+              <a:tr h="408214">
+                <a:tc>
+                  <a:txBody>
+                    <a:bodyPr wrap="square"/>
+                    <a:lstStyle/>
+                    <a:p>
+                      <a:pPr algn="l">
+                        <a:lnSpc>
+                          <a:spcPct val="104000"/>
+                        </a:lnSpc>
+                      </a:pPr>
+                      <a:r>
+                        <a:rPr sz="1000" b="0">
+                          <a:solidFill>
+                            <a:srgbClr val="182238"/>
+                          </a:solidFill>
+                          <a:latin typeface="Aptos"/>
+                        </a:rPr>
+                        <a:t>Miguel Barros</a:t>
+                      </a:r>
+                    </a:p>
+                  </a:txBody>
+                  <a:tcPr anchor="ctr" marL="85725" marR="76200" marT="47625" marB="47625">
+                    <a:solidFill>
+                      <a:srgbClr val="FFFFFF"/>
+                    </a:solidFill>
+                  </a:tcPr>
+                </a:tc>
+                <a:tc>
+                  <a:txBody>
+                    <a:bodyPr wrap="square"/>
+                    <a:lstStyle/>
+                    <a:p>
+                      <a:pPr algn="ctr">
+                        <a:lnSpc>
+                          <a:spcPct val="104000"/>
+                        </a:lnSpc>
+                      </a:pPr>
+                      <a:r>
+                        <a:rPr sz="1000" b="0">
+                          <a:solidFill>
+                            <a:srgbClr val="182238"/>
+                          </a:solidFill>
+                          <a:latin typeface="Aptos"/>
+                        </a:rPr>
+                        <a:t>17 téc/dia</a:t>
+                      </a:r>
+                    </a:p>
+                  </a:txBody>
+                  <a:tcPr anchor="ctr" marL="85725" marR="76200" marT="47625" marB="47625">
+                    <a:solidFill>
+                      <a:srgbClr val="FFFFFF"/>
+                    </a:solidFill>
+                  </a:tcPr>
+                </a:tc>
+                <a:tc>
+                  <a:txBody>
+                    <a:bodyPr wrap="square"/>
+                    <a:lstStyle/>
+                    <a:p>
+                      <a:pPr algn="ctr">
+                        <a:lnSpc>
+                          <a:spcPct val="104000"/>
+                        </a:lnSpc>
+                      </a:pPr>
+                      <a:r>
+                        <a:rPr sz="1000" b="1">
+                          <a:solidFill>
+                            <a:srgbClr val="182238"/>
+                          </a:solidFill>
+                          <a:latin typeface="Aptos"/>
+                        </a:rPr>
+                        <a:t>med 8 · p90 13</a:t>
+                      </a:r>
+                    </a:p>
+                  </a:txBody>
+                  <a:tcPr anchor="ctr" marL="85725" marR="76200" marT="47625" marB="47625">
+                    <a:solidFill>
+                      <a:srgbClr val="FFFFFF"/>
+                    </a:solidFill>
+                  </a:tcPr>
+                </a:tc>
+                <a:tc>
+                  <a:txBody>
+                    <a:bodyPr wrap="square"/>
+                    <a:lstStyle/>
+                    <a:p>
+                      <a:pPr algn="ctr">
+                        <a:lnSpc>
+                          <a:spcPct val="104000"/>
+                        </a:lnSpc>
+                      </a:pPr>
+                      <a:r>
+                        <a:rPr sz="1000" b="0">
+                          <a:solidFill>
+                            <a:srgbClr val="182238"/>
+                          </a:solidFill>
+                          <a:latin typeface="Aptos"/>
+                        </a:rPr>
+                        <a:t>14</a:t>
+                      </a:r>
+                    </a:p>
+                  </a:txBody>
+                  <a:tcPr anchor="ctr" marL="85725" marR="76200" marT="47625" marB="47625">
+                    <a:solidFill>
+                      <a:srgbClr val="FFFFFF"/>
+                    </a:solidFill>
+                  </a:tcPr>
+                </a:tc>
+                <a:tc>
+                  <a:txBody>
+                    <a:bodyPr wrap="square"/>
+                    <a:lstStyle/>
+                    <a:p>
+                      <a:pPr algn="l">
+                        <a:lnSpc>
+                          <a:spcPct val="104000"/>
+                        </a:lnSpc>
+                      </a:pPr>
+                      <a:r>
+                        <a:rPr sz="950" b="1">
+                          <a:solidFill>
+                            <a:srgbClr val="D94545"/>
+                          </a:solidFill>
+                          <a:latin typeface="Aptos"/>
+                        </a:rPr>
+                        <a:t>Turno fixo + SA p/ pico</a:t>
+                      </a:r>
+                    </a:p>
+                  </a:txBody>
+                  <a:tcPr anchor="ctr" marL="85725" marR="76200" marT="47625" marB="47625">
+                    <a:solidFill>
+                      <a:srgbClr val="FFFFFF"/>
+                    </a:solidFill>
+                  </a:tcPr>
+                </a:tc>
+              </a:tr>
+              <a:tr h="408214">
+                <a:tc>
+                  <a:txBody>
+                    <a:bodyPr wrap="square"/>
+                    <a:lstStyle/>
+                    <a:p>
+                      <a:pPr algn="l">
+                        <a:lnSpc>
+                          <a:spcPct val="104000"/>
+                        </a:lnSpc>
+                      </a:pPr>
+                      <a:r>
+                        <a:rPr sz="1000" b="0">
+                          <a:solidFill>
+                            <a:srgbClr val="182238"/>
+                          </a:solidFill>
+                          <a:latin typeface="Aptos"/>
+                        </a:rPr>
+                        <a:t>Rafael Nunes</a:t>
+                      </a:r>
+                    </a:p>
+                  </a:txBody>
+                  <a:tcPr anchor="ctr" marL="85725" marR="76200" marT="47625" marB="47625">
+                    <a:solidFill>
+                      <a:srgbClr val="F3F6FA"/>
+                    </a:solidFill>
+                  </a:tcPr>
+                </a:tc>
+                <a:tc>
+                  <a:txBody>
+                    <a:bodyPr wrap="square"/>
+                    <a:lstStyle/>
+                    <a:p>
+                      <a:pPr algn="ctr">
+                        <a:lnSpc>
+                          <a:spcPct val="104000"/>
+                        </a:lnSpc>
+                      </a:pPr>
+                      <a:r>
+                        <a:rPr sz="1000" b="0">
+                          <a:solidFill>
+                            <a:srgbClr val="182238"/>
+                          </a:solidFill>
+                          <a:latin typeface="Aptos"/>
+                        </a:rPr>
+                        <a:t>8 téc/dia</a:t>
+                      </a:r>
+                    </a:p>
+                  </a:txBody>
+                  <a:tcPr anchor="ctr" marL="85725" marR="76200" marT="47625" marB="47625">
+                    <a:solidFill>
+                      <a:srgbClr val="F3F6FA"/>
+                    </a:solidFill>
+                  </a:tcPr>
+                </a:tc>
+                <a:tc>
+                  <a:txBody>
+                    <a:bodyPr wrap="square"/>
+                    <a:lstStyle/>
+                    <a:p>
+                      <a:pPr algn="ctr">
+                        <a:lnSpc>
+                          <a:spcPct val="104000"/>
+                        </a:lnSpc>
+                      </a:pPr>
+                      <a:r>
+                        <a:rPr sz="1000" b="1">
+                          <a:solidFill>
+                            <a:srgbClr val="182238"/>
+                          </a:solidFill>
+                          <a:latin typeface="Aptos"/>
+                        </a:rPr>
+                        <a:t>med 4 · p90 8</a:t>
+                      </a:r>
+                    </a:p>
+                  </a:txBody>
+                  <a:tcPr anchor="ctr" marL="85725" marR="76200" marT="47625" marB="47625">
+                    <a:solidFill>
+                      <a:srgbClr val="F3F6FA"/>
+                    </a:solidFill>
+                  </a:tcPr>
+                </a:tc>
+                <a:tc>
+                  <a:txBody>
+                    <a:bodyPr wrap="square"/>
+                    <a:lstStyle/>
+                    <a:p>
+                      <a:pPr algn="ctr">
+                        <a:lnSpc>
+                          <a:spcPct val="104000"/>
+                        </a:lnSpc>
+                      </a:pPr>
+                      <a:r>
+                        <a:rPr sz="1000" b="0">
+                          <a:solidFill>
+                            <a:srgbClr val="182238"/>
+                          </a:solidFill>
+                          <a:latin typeface="Aptos"/>
+                        </a:rPr>
+                        <a:t>9</a:t>
+                      </a:r>
+                    </a:p>
+                  </a:txBody>
+                  <a:tcPr anchor="ctr" marL="85725" marR="76200" marT="47625" marB="47625">
+                    <a:solidFill>
+                      <a:srgbClr val="F3F6FA"/>
+                    </a:solidFill>
+                  </a:tcPr>
+                </a:tc>
+                <a:tc>
+                  <a:txBody>
+                    <a:bodyPr wrap="square"/>
+                    <a:lstStyle/>
+                    <a:p>
+                      <a:pPr algn="l">
+                        <a:lnSpc>
+                          <a:spcPct val="104000"/>
+                        </a:lnSpc>
+                      </a:pPr>
+                      <a:r>
+                        <a:rPr sz="950" b="1">
+                          <a:solidFill>
+                            <a:srgbClr val="D94545"/>
+                          </a:solidFill>
+                          <a:latin typeface="Aptos"/>
+                        </a:rPr>
+                        <a:t>Turno fixo + SA p/ pico</a:t>
+                      </a:r>
+                    </a:p>
+                  </a:txBody>
+                  <a:tcPr anchor="ctr" marL="85725" marR="76200" marT="47625" marB="47625">
+                    <a:solidFill>
+                      <a:srgbClr val="F3F6FA"/>
+                    </a:solidFill>
+                  </a:tcPr>
+                </a:tc>
+              </a:tr>
+              <a:tr h="408214">
+                <a:tc>
+                  <a:txBody>
+                    <a:bodyPr wrap="square"/>
+                    <a:lstStyle/>
+                    <a:p>
+                      <a:pPr algn="l">
+                        <a:lnSpc>
+                          <a:spcPct val="104000"/>
+                        </a:lnSpc>
+                      </a:pPr>
+                      <a:r>
+                        <a:rPr sz="1000" b="0">
+                          <a:solidFill>
+                            <a:srgbClr val="182238"/>
+                          </a:solidFill>
+                          <a:latin typeface="Aptos"/>
+                        </a:rPr>
+                        <a:t>Claudio</a:t>
+                      </a:r>
+                    </a:p>
+                  </a:txBody>
+                  <a:tcPr anchor="ctr" marL="85725" marR="76200" marT="47625" marB="47625">
+                    <a:solidFill>
+                      <a:srgbClr val="FFFFFF"/>
+                    </a:solidFill>
+                  </a:tcPr>
+                </a:tc>
+                <a:tc>
+                  <a:txBody>
+                    <a:bodyPr wrap="square"/>
+                    <a:lstStyle/>
+                    <a:p>
+                      <a:pPr algn="ctr">
+                        <a:lnSpc>
+                          <a:spcPct val="104000"/>
+                        </a:lnSpc>
+                      </a:pPr>
+                      <a:r>
+                        <a:rPr sz="1000" b="0">
+                          <a:solidFill>
+                            <a:srgbClr val="182238"/>
+                          </a:solidFill>
+                          <a:latin typeface="Aptos"/>
+                        </a:rPr>
+                        <a:t>8 téc/dia</a:t>
+                      </a:r>
+                    </a:p>
+                  </a:txBody>
+                  <a:tcPr anchor="ctr" marL="85725" marR="76200" marT="47625" marB="47625">
+                    <a:solidFill>
+                      <a:srgbClr val="FFFFFF"/>
+                    </a:solidFill>
+                  </a:tcPr>
+                </a:tc>
+                <a:tc>
+                  <a:txBody>
+                    <a:bodyPr wrap="square"/>
+                    <a:lstStyle/>
+                    <a:p>
+                      <a:pPr algn="ctr">
+                        <a:lnSpc>
+                          <a:spcPct val="104000"/>
+                        </a:lnSpc>
+                      </a:pPr>
+                      <a:r>
+                        <a:rPr sz="1000" b="1">
+                          <a:solidFill>
+                            <a:srgbClr val="182238"/>
+                          </a:solidFill>
+                          <a:latin typeface="Aptos"/>
+                        </a:rPr>
+                        <a:t>med 2 · p90 4</a:t>
+                      </a:r>
+                    </a:p>
+                  </a:txBody>
+                  <a:tcPr anchor="ctr" marL="85725" marR="76200" marT="47625" marB="47625">
+                    <a:solidFill>
+                      <a:srgbClr val="FFFFFF"/>
+                    </a:solidFill>
+                  </a:tcPr>
+                </a:tc>
+                <a:tc>
+                  <a:txBody>
+                    <a:bodyPr wrap="square"/>
+                    <a:lstStyle/>
+                    <a:p>
+                      <a:pPr algn="ctr">
+                        <a:lnSpc>
+                          <a:spcPct val="104000"/>
+                        </a:lnSpc>
+                      </a:pPr>
+                      <a:r>
+                        <a:rPr sz="1000" b="0">
+                          <a:solidFill>
+                            <a:srgbClr val="182238"/>
+                          </a:solidFill>
+                          <a:latin typeface="Aptos"/>
+                        </a:rPr>
+                        <a:t>5</a:t>
+                      </a:r>
+                    </a:p>
+                  </a:txBody>
+                  <a:tcPr anchor="ctr" marL="85725" marR="76200" marT="47625" marB="47625">
+                    <a:solidFill>
+                      <a:srgbClr val="FFFFFF"/>
+                    </a:solidFill>
+                  </a:tcPr>
+                </a:tc>
+                <a:tc>
+                  <a:txBody>
+                    <a:bodyPr wrap="square"/>
+                    <a:lstStyle/>
+                    <a:p>
+                      <a:pPr algn="l">
+                        <a:lnSpc>
+                          <a:spcPct val="104000"/>
+                        </a:lnSpc>
+                      </a:pPr>
+                      <a:r>
+                        <a:rPr sz="950" b="1">
+                          <a:solidFill>
+                            <a:srgbClr val="D94545"/>
+                          </a:solidFill>
+                          <a:latin typeface="Aptos"/>
+                        </a:rPr>
+                        <a:t>Turno fixo + SA p/ pico</a:t>
+                      </a:r>
+                    </a:p>
+                  </a:txBody>
+                  <a:tcPr anchor="ctr" marL="85725" marR="76200" marT="47625" marB="47625">
+                    <a:solidFill>
+                      <a:srgbClr val="FFFFFF"/>
+                    </a:solidFill>
+                  </a:tcPr>
+                </a:tc>
+              </a:tr>
+              <a:tr h="408214">
+                <a:tc>
+                  <a:txBody>
+                    <a:bodyPr wrap="square"/>
+                    <a:lstStyle/>
+                    <a:p>
+                      <a:pPr algn="l">
+                        <a:lnSpc>
+                          <a:spcPct val="104000"/>
+                        </a:lnSpc>
+                      </a:pPr>
+                      <a:r>
+                        <a:rPr sz="1000" b="0">
+                          <a:solidFill>
+                            <a:srgbClr val="182238"/>
+                          </a:solidFill>
+                          <a:latin typeface="Aptos"/>
+                        </a:rPr>
+                        <a:t>Wagner</a:t>
+                      </a:r>
+                    </a:p>
+                  </a:txBody>
+                  <a:tcPr anchor="ctr" marL="85725" marR="76200" marT="47625" marB="47625">
+                    <a:solidFill>
+                      <a:srgbClr val="F3F6FA"/>
+                    </a:solidFill>
+                  </a:tcPr>
+                </a:tc>
+                <a:tc>
+                  <a:txBody>
+                    <a:bodyPr wrap="square"/>
+                    <a:lstStyle/>
+                    <a:p>
+                      <a:pPr algn="ctr">
+                        <a:lnSpc>
+                          <a:spcPct val="104000"/>
+                        </a:lnSpc>
+                      </a:pPr>
+                      <a:r>
+                        <a:rPr sz="1000" b="0">
+                          <a:solidFill>
+                            <a:srgbClr val="182238"/>
+                          </a:solidFill>
+                          <a:latin typeface="Aptos"/>
+                        </a:rPr>
+                        <a:t>1 téc/dia</a:t>
+                      </a:r>
+                    </a:p>
+                  </a:txBody>
+                  <a:tcPr anchor="ctr" marL="85725" marR="76200" marT="47625" marB="47625">
+                    <a:solidFill>
+                      <a:srgbClr val="F3F6FA"/>
+                    </a:solidFill>
+                  </a:tcPr>
+                </a:tc>
+                <a:tc>
+                  <a:txBody>
+                    <a:bodyPr wrap="square"/>
+                    <a:lstStyle/>
+                    <a:p>
+                      <a:pPr algn="ctr">
+                        <a:lnSpc>
+                          <a:spcPct val="104000"/>
+                        </a:lnSpc>
+                      </a:pPr>
+                      <a:r>
+                        <a:rPr sz="1000" b="1">
+                          <a:solidFill>
+                            <a:srgbClr val="182238"/>
+                          </a:solidFill>
+                          <a:latin typeface="Aptos"/>
+                        </a:rPr>
+                        <a:t>med 1 · p90 1</a:t>
+                      </a:r>
+                    </a:p>
+                  </a:txBody>
+                  <a:tcPr anchor="ctr" marL="85725" marR="76200" marT="47625" marB="47625">
+                    <a:solidFill>
+                      <a:srgbClr val="F3F6FA"/>
+                    </a:solidFill>
+                  </a:tcPr>
+                </a:tc>
+                <a:tc>
+                  <a:txBody>
+                    <a:bodyPr wrap="square"/>
+                    <a:lstStyle/>
+                    <a:p>
+                      <a:pPr algn="ctr">
+                        <a:lnSpc>
+                          <a:spcPct val="104000"/>
+                        </a:lnSpc>
+                      </a:pPr>
+                      <a:r>
+                        <a:rPr sz="1000" b="0">
+                          <a:solidFill>
+                            <a:srgbClr val="182238"/>
+                          </a:solidFill>
+                          <a:latin typeface="Aptos"/>
+                        </a:rPr>
+                        <a:t>1</a:t>
+                      </a:r>
+                    </a:p>
+                  </a:txBody>
+                  <a:tcPr anchor="ctr" marL="85725" marR="76200" marT="47625" marB="47625">
+                    <a:solidFill>
+                      <a:srgbClr val="F3F6FA"/>
+                    </a:solidFill>
+                  </a:tcPr>
+                </a:tc>
+                <a:tc>
+                  <a:txBody>
+                    <a:bodyPr wrap="square"/>
+                    <a:lstStyle/>
+                    <a:p>
+                      <a:pPr algn="l">
+                        <a:lnSpc>
+                          <a:spcPct val="104000"/>
+                        </a:lnSpc>
+                      </a:pPr>
+                      <a:r>
+                        <a:rPr sz="950" b="1">
+                          <a:solidFill>
+                            <a:srgbClr val="13853A"/>
+                          </a:solidFill>
+                          <a:latin typeface="Aptos"/>
+                        </a:rPr>
+                        <a:t>Manter SA mínimo</a:t>
+                      </a:r>
+                    </a:p>
+                  </a:txBody>
+                  <a:tcPr anchor="ctr" marL="85725" marR="76200" marT="47625" marB="47625">
+                    <a:solidFill>
+                      <a:srgbClr val="F3F6FA"/>
+                    </a:solidFill>
+                  </a:tcPr>
+                </a:tc>
+              </a:tr>
+              <a:tr h="408214">
+                <a:tc>
+                  <a:txBody>
+                    <a:bodyPr wrap="square"/>
+                    <a:lstStyle/>
+                    <a:p>
+                      <a:pPr algn="l">
+                        <a:lnSpc>
+                          <a:spcPct val="104000"/>
+                        </a:lnSpc>
+                      </a:pPr>
+                      <a:r>
+                        <a:rPr sz="1000" b="0">
+                          <a:solidFill>
+                            <a:srgbClr val="182238"/>
+                          </a:solidFill>
+                          <a:latin typeface="Aptos"/>
+                        </a:rPr>
+                        <a:t>Dejamir Sousa</a:t>
+                      </a:r>
+                    </a:p>
+                  </a:txBody>
+                  <a:tcPr anchor="ctr" marL="85725" marR="76200" marT="47625" marB="47625">
+                    <a:solidFill>
+                      <a:srgbClr val="FFFFFF"/>
+                    </a:solidFill>
+                  </a:tcPr>
+                </a:tc>
+                <a:tc>
+                  <a:txBody>
+                    <a:bodyPr wrap="square"/>
+                    <a:lstStyle/>
+                    <a:p>
+                      <a:pPr algn="ctr">
+                        <a:lnSpc>
+                          <a:spcPct val="104000"/>
+                        </a:lnSpc>
+                      </a:pPr>
+                      <a:r>
+                        <a:rPr sz="1000" b="0">
+                          <a:solidFill>
+                            <a:srgbClr val="182238"/>
+                          </a:solidFill>
+                          <a:latin typeface="Aptos"/>
+                        </a:rPr>
+                        <a:t>2 téc/dia</a:t>
+                      </a:r>
+                    </a:p>
+                  </a:txBody>
+                  <a:tcPr anchor="ctr" marL="85725" marR="76200" marT="47625" marB="47625">
+                    <a:solidFill>
+                      <a:srgbClr val="FFFFFF"/>
+                    </a:solidFill>
+                  </a:tcPr>
+                </a:tc>
+                <a:tc>
+                  <a:txBody>
+                    <a:bodyPr wrap="square"/>
+                    <a:lstStyle/>
+                    <a:p>
+                      <a:pPr algn="ctr">
+                        <a:lnSpc>
+                          <a:spcPct val="104000"/>
+                        </a:lnSpc>
+                      </a:pPr>
+                      <a:r>
+                        <a:rPr sz="1000" b="1">
+                          <a:solidFill>
+                            <a:srgbClr val="182238"/>
+                          </a:solidFill>
+                          <a:latin typeface="Aptos"/>
+                        </a:rPr>
+                        <a:t>med 1 · p90 1</a:t>
+                      </a:r>
+                    </a:p>
+                  </a:txBody>
+                  <a:tcPr anchor="ctr" marL="85725" marR="76200" marT="47625" marB="47625">
+                    <a:solidFill>
+                      <a:srgbClr val="FFFFFF"/>
+                    </a:solidFill>
+                  </a:tcPr>
+                </a:tc>
+                <a:tc>
+                  <a:txBody>
+                    <a:bodyPr wrap="square"/>
+                    <a:lstStyle/>
+                    <a:p>
+                      <a:pPr algn="ctr">
+                        <a:lnSpc>
+                          <a:spcPct val="104000"/>
+                        </a:lnSpc>
+                      </a:pPr>
+                      <a:r>
+                        <a:rPr sz="1000" b="0">
+                          <a:solidFill>
+                            <a:srgbClr val="182238"/>
+                          </a:solidFill>
+                          <a:latin typeface="Aptos"/>
+                        </a:rPr>
+                        <a:t>1</a:t>
+                      </a:r>
+                    </a:p>
+                  </a:txBody>
+                  <a:tcPr anchor="ctr" marL="85725" marR="76200" marT="47625" marB="47625">
+                    <a:solidFill>
+                      <a:srgbClr val="FFFFFF"/>
+                    </a:solidFill>
+                  </a:tcPr>
+                </a:tc>
+                <a:tc>
+                  <a:txBody>
+                    <a:bodyPr wrap="square"/>
+                    <a:lstStyle/>
+                    <a:p>
+                      <a:pPr algn="l">
+                        <a:lnSpc>
+                          <a:spcPct val="104000"/>
+                        </a:lnSpc>
+                      </a:pPr>
+                      <a:r>
+                        <a:rPr sz="950" b="1">
+                          <a:solidFill>
+                            <a:srgbClr val="13853A"/>
+                          </a:solidFill>
+                          <a:latin typeface="Aptos"/>
+                        </a:rPr>
+                        <a:t>Manter SA mínimo</a:t>
+                      </a:r>
+                    </a:p>
+                  </a:txBody>
+                  <a:tcPr anchor="ctr" marL="85725" marR="76200" marT="47625" marB="47625">
+                    <a:solidFill>
+                      <a:srgbClr val="FFFFFF"/>
+                    </a:solidFill>
+                  </a:tcPr>
+                </a:tc>
+              </a:tr>
+              <a:tr h="408216">
+                <a:tc>
+                  <a:txBody>
+                    <a:bodyPr wrap="square"/>
+                    <a:lstStyle/>
+                    <a:p>
+                      <a:pPr algn="l">
+                        <a:lnSpc>
+                          <a:spcPct val="104000"/>
+                        </a:lnSpc>
+                      </a:pPr>
+                      <a:r>
+                        <a:rPr sz="1000" b="0">
+                          <a:solidFill>
+                            <a:srgbClr val="182238"/>
+                          </a:solidFill>
+                          <a:latin typeface="Aptos"/>
+                        </a:rPr>
+                        <a:t>Anderson Adelino</a:t>
+                      </a:r>
+                    </a:p>
+                  </a:txBody>
+                  <a:tcPr anchor="ctr" marL="85725" marR="76200" marT="47625" marB="47625">
+                    <a:solidFill>
+                      <a:srgbClr val="F3F6FA"/>
+                    </a:solidFill>
+                  </a:tcPr>
+                </a:tc>
+                <a:tc>
+                  <a:txBody>
+                    <a:bodyPr wrap="square"/>
+                    <a:lstStyle/>
+                    <a:p>
+                      <a:pPr algn="ctr">
+                        <a:lnSpc>
+                          <a:spcPct val="104000"/>
+                        </a:lnSpc>
+                      </a:pPr>
+                      <a:r>
+                        <a:rPr sz="1000" b="0">
+                          <a:solidFill>
+                            <a:srgbClr val="182238"/>
+                          </a:solidFill>
+                          <a:latin typeface="Aptos"/>
+                        </a:rPr>
+                        <a:t>1 téc/dia</a:t>
+                      </a:r>
+                    </a:p>
+                  </a:txBody>
+                  <a:tcPr anchor="ctr" marL="85725" marR="76200" marT="47625" marB="47625">
+                    <a:solidFill>
+                      <a:srgbClr val="F3F6FA"/>
+                    </a:solidFill>
+                  </a:tcPr>
+                </a:tc>
+                <a:tc>
+                  <a:txBody>
+                    <a:bodyPr wrap="square"/>
+                    <a:lstStyle/>
+                    <a:p>
+                      <a:pPr algn="ctr">
+                        <a:lnSpc>
+                          <a:spcPct val="104000"/>
+                        </a:lnSpc>
+                      </a:pPr>
+                      <a:r>
+                        <a:rPr sz="1000" b="1">
+                          <a:solidFill>
+                            <a:srgbClr val="182238"/>
+                          </a:solidFill>
+                          <a:latin typeface="Aptos"/>
+                        </a:rPr>
+                        <a:t>med 1 · p90 1</a:t>
+                      </a:r>
+                    </a:p>
+                  </a:txBody>
+                  <a:tcPr anchor="ctr" marL="85725" marR="76200" marT="47625" marB="47625">
+                    <a:solidFill>
+                      <a:srgbClr val="F3F6FA"/>
+                    </a:solidFill>
+                  </a:tcPr>
+                </a:tc>
+                <a:tc>
+                  <a:txBody>
+                    <a:bodyPr wrap="square"/>
+                    <a:lstStyle/>
+                    <a:p>
+                      <a:pPr algn="ctr">
+                        <a:lnSpc>
+                          <a:spcPct val="104000"/>
+                        </a:lnSpc>
+                      </a:pPr>
+                      <a:r>
+                        <a:rPr sz="1000" b="0">
+                          <a:solidFill>
+                            <a:srgbClr val="182238"/>
+                          </a:solidFill>
+                          <a:latin typeface="Aptos"/>
+                        </a:rPr>
+                        <a:t>1</a:t>
+                      </a:r>
+                    </a:p>
+                  </a:txBody>
+                  <a:tcPr anchor="ctr" marL="85725" marR="76200" marT="47625" marB="47625">
+                    <a:solidFill>
+                      <a:srgbClr val="F3F6FA"/>
+                    </a:solidFill>
+                  </a:tcPr>
+                </a:tc>
+                <a:tc>
+                  <a:txBody>
+                    <a:bodyPr wrap="square"/>
+                    <a:lstStyle/>
+                    <a:p>
+                      <a:pPr algn="l">
+                        <a:lnSpc>
+                          <a:spcPct val="104000"/>
+                        </a:lnSpc>
+                      </a:pPr>
+                      <a:r>
+                        <a:rPr sz="950" b="1">
+                          <a:solidFill>
+                            <a:srgbClr val="9A6200"/>
+                          </a:solidFill>
+                          <a:latin typeface="Aptos"/>
+                        </a:rPr>
+                        <a:t>SA enxuto (p90)</a:t>
+                      </a:r>
+                    </a:p>
+                  </a:txBody>
+                  <a:tcPr anchor="ctr" marL="85725" marR="76200" marT="47625" marB="47625">
+                    <a:solidFill>
+                      <a:srgbClr val="F3F6FA"/>
+                    </a:solidFill>
+                  </a:tcPr>
+                </a:tc>
+              </a:tr>
+            </a:tbl>
+          </a:graphicData>
+        </a:graphic>
+      </p:graphicFrame>
+      <p:sp>
+        <p:nvSpPr>
+          <p:cNvPr id="13" name="Rounded Rectangle 12"/>
           <p:cNvSpPr/>
           <p:nvPr/>
         </p:nvSpPr>
         <p:spPr>
           <a:xfrm>
-            <a:off x="533400" y="1428750"/>
-            <a:ext cx="3429000" cy="1428750"/>
+            <a:off x="533400" y="4914900"/>
+            <a:ext cx="6286500" cy="590550"/>
+          </a:xfrm>
+          <a:prstGeom prst="roundRect">
+            <a:avLst>
+              <a:gd name="adj" fmla="val 6000"/>
+            </a:avLst>
+          </a:prstGeom>
+          <a:solidFill>
+            <a:srgbClr val="FDE2DF"/>
+          </a:solidFill>
+          <a:ln>
+            <a:noFill/>
+          </a:ln>
+          <a:effectLst/>
+        </p:spPr>
+        <p:style>
+          <a:lnRef idx="1">
+            <a:schemeClr val="accent1"/>
+          </a:lnRef>
+          <a:fillRef idx="3">
+            <a:schemeClr val="accent1"/>
+          </a:fillRef>
+          <a:effectRef idx="2">
+            <a:schemeClr val="accent1"/>
+          </a:effectRef>
+          <a:fontRef idx="minor">
+            <a:schemeClr val="lt1"/>
+          </a:fontRef>
+        </p:style>
+        <p:txBody>
+          <a:bodyPr rtlCol="0" anchor="ctr"/>
+          <a:lstStyle/>
+          <a:p>
+            <a:pPr algn="ctr"/>
+          </a:p>
+        </p:txBody>
+      </p:sp>
+      <p:sp>
+        <p:nvSpPr>
+          <p:cNvPr id="14" name="TextBox 13"/>
+          <p:cNvSpPr txBox="1"/>
+          <p:nvPr/>
+        </p:nvSpPr>
+        <p:spPr>
+          <a:xfrm>
+            <a:off x="723900" y="5010150"/>
+            <a:ext cx="2857500" cy="133350"/>
+          </a:xfrm>
+          <a:prstGeom prst="rect">
+            <a:avLst/>
+          </a:prstGeom>
+          <a:noFill/>
+        </p:spPr>
+        <p:txBody>
+          <a:bodyPr wrap="square" anchor="t" lIns="0" rIns="0" tIns="0" bIns="0">
+            <a:spAutoFit/>
+          </a:bodyPr>
+          <a:lstStyle/>
+          <a:p>
+            <a:pPr algn="l">
+              <a:lnSpc>
+                <a:spcPct val="106000"/>
+              </a:lnSpc>
+            </a:pPr>
+            <a:r>
+              <a:rPr sz="1000" b="1">
+                <a:solidFill>
+                  <a:srgbClr val="D94545"/>
+                </a:solidFill>
+                <a:latin typeface="Aptos"/>
+              </a:rPr>
+              <a:t>REGRA DE PISO (RISCO)</a:t>
+            </a:r>
+          </a:p>
+        </p:txBody>
+      </p:sp>
+      <p:sp>
+        <p:nvSpPr>
+          <p:cNvPr id="15" name="TextBox 14"/>
+          <p:cNvSpPr txBox="1"/>
+          <p:nvPr/>
+        </p:nvSpPr>
+        <p:spPr>
+          <a:xfrm>
+            <a:off x="723900" y="5162550"/>
+            <a:ext cx="5924550" cy="304800"/>
+          </a:xfrm>
+          <a:prstGeom prst="rect">
+            <a:avLst/>
+          </a:prstGeom>
+          <a:noFill/>
+        </p:spPr>
+        <p:txBody>
+          <a:bodyPr wrap="square" anchor="t" lIns="0" rIns="0" tIns="0" bIns="0">
+            <a:spAutoFit/>
+          </a:bodyPr>
+          <a:lstStyle/>
+          <a:p>
+            <a:pPr algn="l">
+              <a:lnSpc>
+                <a:spcPct val="106000"/>
+              </a:lnSpc>
+            </a:pPr>
+            <a:r>
+              <a:rPr sz="1050" b="0">
+                <a:solidFill>
+                  <a:srgbClr val="182238"/>
+                </a:solidFill>
+                <a:latin typeface="Aptos"/>
+              </a:rPr>
+              <a:t>Nenhuma GA reduz plantão abaixo do p90 de acionados simultâneos sem turno fixo no lugar. O pico raro (máx) é coberto por backup combinado entre GAs vizinhas.</a:t>
+            </a:r>
+          </a:p>
+        </p:txBody>
+      </p:sp>
+      <p:sp>
+        <p:nvSpPr>
+          <p:cNvPr id="16" name="Rounded Rectangle 15"/>
+          <p:cNvSpPr/>
+          <p:nvPr/>
+        </p:nvSpPr>
+        <p:spPr>
+          <a:xfrm>
+            <a:off x="7048500" y="1447800"/>
+            <a:ext cx="4591050" cy="1809750"/>
+          </a:xfrm>
+          <a:prstGeom prst="roundRect">
+            <a:avLst>
+              <a:gd name="adj" fmla="val 6000"/>
+            </a:avLst>
+          </a:prstGeom>
+          <a:solidFill>
+            <a:srgbClr val="081551"/>
+          </a:solidFill>
+          <a:ln>
+            <a:noFill/>
+          </a:ln>
+          <a:effectLst/>
+        </p:spPr>
+        <p:style>
+          <a:lnRef idx="1">
+            <a:schemeClr val="accent1"/>
+          </a:lnRef>
+          <a:fillRef idx="3">
+            <a:schemeClr val="accent1"/>
+          </a:fillRef>
+          <a:effectRef idx="2">
+            <a:schemeClr val="accent1"/>
+          </a:effectRef>
+          <a:fontRef idx="minor">
+            <a:schemeClr val="lt1"/>
+          </a:fontRef>
+        </p:style>
+        <p:txBody>
+          <a:bodyPr rtlCol="0" anchor="ctr"/>
+          <a:lstStyle/>
+          <a:p>
+            <a:pPr algn="ctr"/>
+          </a:p>
+        </p:txBody>
+      </p:sp>
+      <p:sp>
+        <p:nvSpPr>
+          <p:cNvPr id="17" name="TextBox 16"/>
+          <p:cNvSpPr txBox="1"/>
+          <p:nvPr/>
+        </p:nvSpPr>
+        <p:spPr>
+          <a:xfrm>
+            <a:off x="7258050" y="1562100"/>
+            <a:ext cx="3810000" cy="133350"/>
+          </a:xfrm>
+          <a:prstGeom prst="rect">
+            <a:avLst/>
+          </a:prstGeom>
+          <a:noFill/>
+        </p:spPr>
+        <p:txBody>
+          <a:bodyPr wrap="square" anchor="t" lIns="0" rIns="0" tIns="0" bIns="0">
+            <a:spAutoFit/>
+          </a:bodyPr>
+          <a:lstStyle/>
+          <a:p>
+            <a:pPr algn="l">
+              <a:lnSpc>
+                <a:spcPct val="106000"/>
+              </a:lnSpc>
+            </a:pPr>
+            <a:r>
+              <a:rPr sz="1050" b="1">
+                <a:solidFill>
+                  <a:srgbClr val="9FC9EE"/>
+                </a:solidFill>
+                <a:latin typeface="Aptos"/>
+              </a:rPr>
+              <a:t>A CONTA DA CONVERSÃO</a:t>
+            </a:r>
+          </a:p>
+        </p:txBody>
+      </p:sp>
+      <p:sp>
+        <p:nvSpPr>
+          <p:cNvPr id="18" name="TextBox 17"/>
+          <p:cNvSpPr txBox="1"/>
+          <p:nvPr/>
+        </p:nvSpPr>
+        <p:spPr>
+          <a:xfrm>
+            <a:off x="7258050" y="1771650"/>
+            <a:ext cx="1123950" cy="285750"/>
+          </a:xfrm>
+          <a:prstGeom prst="rect">
+            <a:avLst/>
+          </a:prstGeom>
+          <a:noFill/>
+        </p:spPr>
+        <p:txBody>
+          <a:bodyPr wrap="square" anchor="t" lIns="0" rIns="0" tIns="0" bIns="0">
+            <a:spAutoFit/>
+          </a:bodyPr>
+          <a:lstStyle/>
+          <a:p>
+            <a:pPr algn="l">
+              <a:lnSpc>
+                <a:spcPct val="106000"/>
+              </a:lnSpc>
+            </a:pPr>
+            <a:r>
+              <a:rPr sz="2200" b="1">
+                <a:solidFill>
+                  <a:srgbClr val="FFFFFF"/>
+                </a:solidFill>
+                <a:latin typeface="Aptos Display"/>
+              </a:rPr>
+              <a:t>R$ 23,60</a:t>
+            </a:r>
+          </a:p>
+        </p:txBody>
+      </p:sp>
+      <p:sp>
+        <p:nvSpPr>
+          <p:cNvPr id="19" name="TextBox 18"/>
+          <p:cNvSpPr txBox="1"/>
+          <p:nvPr/>
+        </p:nvSpPr>
+        <p:spPr>
+          <a:xfrm>
+            <a:off x="8477250" y="1771650"/>
+            <a:ext cx="2971800" cy="285750"/>
+          </a:xfrm>
+          <a:prstGeom prst="rect">
+            <a:avLst/>
+          </a:prstGeom>
+          <a:noFill/>
+        </p:spPr>
+        <p:txBody>
+          <a:bodyPr wrap="square" anchor="ctr" lIns="0" rIns="0" tIns="0" bIns="0">
+            <a:spAutoFit/>
+          </a:bodyPr>
+          <a:lstStyle/>
+          <a:p>
+            <a:pPr algn="l">
+              <a:lnSpc>
+                <a:spcPct val="106000"/>
+              </a:lnSpc>
+            </a:pPr>
+            <a:r>
+              <a:rPr sz="1050" b="0">
+                <a:solidFill>
+                  <a:srgbClr val="C9D6EF"/>
+                </a:solidFill>
+                <a:latin typeface="Aptos"/>
+              </a:rPr>
+              <a:t>por hora acionada em sobreaviso (HE + adicionais)</a:t>
+            </a:r>
+          </a:p>
+        </p:txBody>
+      </p:sp>
+      <p:sp>
+        <p:nvSpPr>
+          <p:cNvPr id="20" name="TextBox 19"/>
+          <p:cNvSpPr txBox="1"/>
+          <p:nvPr/>
+        </p:nvSpPr>
+        <p:spPr>
+          <a:xfrm>
+            <a:off x="7258050" y="2114550"/>
+            <a:ext cx="1123950" cy="285750"/>
+          </a:xfrm>
+          <a:prstGeom prst="rect">
+            <a:avLst/>
+          </a:prstGeom>
+          <a:noFill/>
+        </p:spPr>
+        <p:txBody>
+          <a:bodyPr wrap="square" anchor="t" lIns="0" rIns="0" tIns="0" bIns="0">
+            <a:spAutoFit/>
+          </a:bodyPr>
+          <a:lstStyle/>
+          <a:p>
+            <a:pPr algn="l">
+              <a:lnSpc>
+                <a:spcPct val="106000"/>
+              </a:lnSpc>
+            </a:pPr>
+            <a:r>
+              <a:rPr sz="2200" b="1">
+                <a:solidFill>
+                  <a:srgbClr val="42DF4B"/>
+                </a:solidFill>
+                <a:latin typeface="Aptos Display"/>
+              </a:rPr>
+              <a:t>R$ 12,43</a:t>
+            </a:r>
+          </a:p>
+        </p:txBody>
+      </p:sp>
+      <p:sp>
+        <p:nvSpPr>
+          <p:cNvPr id="21" name="TextBox 20"/>
+          <p:cNvSpPr txBox="1"/>
+          <p:nvPr/>
+        </p:nvSpPr>
+        <p:spPr>
+          <a:xfrm>
+            <a:off x="8477250" y="2114550"/>
+            <a:ext cx="2971800" cy="285750"/>
+          </a:xfrm>
+          <a:prstGeom prst="rect">
+            <a:avLst/>
+          </a:prstGeom>
+          <a:noFill/>
+        </p:spPr>
+        <p:txBody>
+          <a:bodyPr wrap="square" anchor="ctr" lIns="0" rIns="0" tIns="0" bIns="0">
+            <a:spAutoFit/>
+          </a:bodyPr>
+          <a:lstStyle/>
+          <a:p>
+            <a:pPr algn="l">
+              <a:lnSpc>
+                <a:spcPct val="106000"/>
+              </a:lnSpc>
+            </a:pPr>
+            <a:r>
+              <a:rPr sz="1050" b="0">
+                <a:solidFill>
+                  <a:srgbClr val="C9D6EF"/>
+                </a:solidFill>
+                <a:latin typeface="Aptos"/>
+              </a:rPr>
+              <a:t>por hora em turno fixo noturno (estimado*)</a:t>
+            </a:r>
+          </a:p>
+        </p:txBody>
+      </p:sp>
+      <p:sp>
+        <p:nvSpPr>
+          <p:cNvPr id="22" name="TextBox 21"/>
+          <p:cNvSpPr txBox="1"/>
+          <p:nvPr/>
+        </p:nvSpPr>
+        <p:spPr>
+          <a:xfrm>
+            <a:off x="7258050" y="2495550"/>
+            <a:ext cx="4191000" cy="381000"/>
+          </a:xfrm>
+          <a:prstGeom prst="rect">
+            <a:avLst/>
+          </a:prstGeom>
+          <a:noFill/>
+        </p:spPr>
+        <p:txBody>
+          <a:bodyPr wrap="square" anchor="t" lIns="0" rIns="0" tIns="0" bIns="0">
+            <a:spAutoFit/>
+          </a:bodyPr>
+          <a:lstStyle/>
+          <a:p>
+            <a:pPr algn="l">
+              <a:lnSpc>
+                <a:spcPct val="106000"/>
+              </a:lnSpc>
+            </a:pPr>
+            <a:r>
+              <a:rPr sz="1250" b="1">
+                <a:solidFill>
+                  <a:srgbClr val="FFFFFF"/>
+                </a:solidFill>
+                <a:latin typeface="Aptos"/>
+              </a:rPr>
+              <a:t>Converter a demanda diária das GAs estruturais economiza R$ 34,2 mil/mês — sem perder cobertura.</a:t>
+            </a:r>
+          </a:p>
+        </p:txBody>
+      </p:sp>
+      <p:sp>
+        <p:nvSpPr>
+          <p:cNvPr id="23" name="TextBox 22"/>
+          <p:cNvSpPr txBox="1"/>
+          <p:nvPr/>
+        </p:nvSpPr>
+        <p:spPr>
+          <a:xfrm>
+            <a:off x="7258050" y="2971800"/>
+            <a:ext cx="4191000" cy="228600"/>
+          </a:xfrm>
+          <a:prstGeom prst="rect">
+            <a:avLst/>
+          </a:prstGeom>
+          <a:noFill/>
+        </p:spPr>
+        <p:txBody>
+          <a:bodyPr wrap="square" anchor="t" lIns="0" rIns="0" tIns="0" bIns="0">
+            <a:spAutoFit/>
+          </a:bodyPr>
+          <a:lstStyle/>
+          <a:p>
+            <a:pPr algn="l">
+              <a:lnSpc>
+                <a:spcPct val="106000"/>
+              </a:lnSpc>
+            </a:pPr>
+            <a:r>
+              <a:rPr sz="850" b="0">
+                <a:solidFill>
+                  <a:srgbClr val="8FA3CE"/>
+                </a:solidFill>
+                <a:latin typeface="Aptos"/>
+              </a:rPr>
+              <a:t>*hora-base derivada da própria espera (1/3 da hora normal) + 20% de adicional noturno. Validar com RH.</a:t>
+            </a:r>
+          </a:p>
+        </p:txBody>
+      </p:sp>
+      <p:sp>
+        <p:nvSpPr>
+          <p:cNvPr id="24" name="Rounded Rectangle 23"/>
+          <p:cNvSpPr/>
+          <p:nvPr/>
+        </p:nvSpPr>
+        <p:spPr>
+          <a:xfrm>
+            <a:off x="7048500" y="3390900"/>
+            <a:ext cx="4591050" cy="2114550"/>
           </a:xfrm>
           <a:prstGeom prst="roundRect">
             <a:avLst>
@@ -11583,6 +13461,1341 @@
       </p:sp>
       <p:sp>
         <p:nvSpPr>
+          <p:cNvPr id="25" name="TextBox 24"/>
+          <p:cNvSpPr txBox="1"/>
+          <p:nvPr/>
+        </p:nvSpPr>
+        <p:spPr>
+          <a:xfrm>
+            <a:off x="7258050" y="3505200"/>
+            <a:ext cx="4191000" cy="152400"/>
+          </a:xfrm>
+          <a:prstGeom prst="rect">
+            <a:avLst/>
+          </a:prstGeom>
+          <a:noFill/>
+        </p:spPr>
+        <p:txBody>
+          <a:bodyPr wrap="square" anchor="t" lIns="0" rIns="0" tIns="0" bIns="0">
+            <a:spAutoFit/>
+          </a:bodyPr>
+          <a:lstStyle/>
+          <a:p>
+            <a:pPr algn="l">
+              <a:lnSpc>
+                <a:spcPct val="106000"/>
+              </a:lnSpc>
+            </a:pPr>
+            <a:r>
+              <a:rPr sz="1200" b="1">
+                <a:solidFill>
+                  <a:srgbClr val="081551"/>
+                </a:solidFill>
+                <a:latin typeface="Aptos"/>
+              </a:rPr>
+              <a:t>Quem já trabalha o turno — só que pago como HE</a:t>
+            </a:r>
+          </a:p>
+        </p:txBody>
+      </p:sp>
+      <p:sp>
+        <p:nvSpPr>
+          <p:cNvPr id="26" name="TextBox 25"/>
+          <p:cNvSpPr txBox="1"/>
+          <p:nvPr/>
+        </p:nvSpPr>
+        <p:spPr>
+          <a:xfrm>
+            <a:off x="7258050" y="3695700"/>
+            <a:ext cx="4191000" cy="152400"/>
+          </a:xfrm>
+          <a:prstGeom prst="rect">
+            <a:avLst/>
+          </a:prstGeom>
+          <a:noFill/>
+        </p:spPr>
+        <p:txBody>
+          <a:bodyPr wrap="square" anchor="t" lIns="0" rIns="0" tIns="0" bIns="0">
+            <a:spAutoFit/>
+          </a:bodyPr>
+          <a:lstStyle/>
+          <a:p>
+            <a:pPr algn="l">
+              <a:lnSpc>
+                <a:spcPct val="106000"/>
+              </a:lnSpc>
+            </a:pPr>
+            <a:r>
+              <a:rPr sz="1000" b="0">
+                <a:solidFill>
+                  <a:srgbClr val="667085"/>
+                </a:solidFill>
+                <a:latin typeface="Aptos"/>
+              </a:rPr>
+              <a:t>Top 10 técnicos = 33% de todas as horas de acionamento. Os 5 maiores:</a:t>
+            </a:r>
+          </a:p>
+        </p:txBody>
+      </p:sp>
+      <p:sp>
+        <p:nvSpPr>
+          <p:cNvPr id="27" name="TextBox 26"/>
+          <p:cNvSpPr txBox="1"/>
+          <p:nvPr/>
+        </p:nvSpPr>
+        <p:spPr>
+          <a:xfrm>
+            <a:off x="7258050" y="3867150"/>
+            <a:ext cx="1428750" cy="152400"/>
+          </a:xfrm>
+          <a:prstGeom prst="rect">
+            <a:avLst/>
+          </a:prstGeom>
+          <a:noFill/>
+        </p:spPr>
+        <p:txBody>
+          <a:bodyPr wrap="square" anchor="t" lIns="0" rIns="0" tIns="0" bIns="0">
+            <a:spAutoFit/>
+          </a:bodyPr>
+          <a:lstStyle/>
+          <a:p>
+            <a:pPr algn="l">
+              <a:lnSpc>
+                <a:spcPct val="106000"/>
+              </a:lnSpc>
+            </a:pPr>
+            <a:r>
+              <a:rPr sz="1000" b="0">
+                <a:solidFill>
+                  <a:srgbClr val="182238"/>
+                </a:solidFill>
+                <a:latin typeface="Aptos"/>
+              </a:rPr>
+              <a:t>Ricardo Wilato</a:t>
+            </a:r>
+          </a:p>
+        </p:txBody>
+      </p:sp>
+      <p:sp>
+        <p:nvSpPr>
+          <p:cNvPr id="28" name="Rectangle 27"/>
+          <p:cNvSpPr/>
+          <p:nvPr/>
+        </p:nvSpPr>
+        <p:spPr>
+          <a:xfrm>
+            <a:off x="8724900" y="3886200"/>
+            <a:ext cx="1714500" cy="114300"/>
+          </a:xfrm>
+          <a:prstGeom prst="rect">
+            <a:avLst/>
+          </a:prstGeom>
+          <a:solidFill>
+            <a:srgbClr val="E7EDF5"/>
+          </a:solidFill>
+          <a:ln>
+            <a:noFill/>
+          </a:ln>
+          <a:effectLst/>
+        </p:spPr>
+        <p:style>
+          <a:lnRef idx="1">
+            <a:schemeClr val="accent1"/>
+          </a:lnRef>
+          <a:fillRef idx="3">
+            <a:schemeClr val="accent1"/>
+          </a:fillRef>
+          <a:effectRef idx="2">
+            <a:schemeClr val="accent1"/>
+          </a:effectRef>
+          <a:fontRef idx="minor">
+            <a:schemeClr val="lt1"/>
+          </a:fontRef>
+        </p:style>
+        <p:txBody>
+          <a:bodyPr rtlCol="0" anchor="ctr"/>
+          <a:lstStyle/>
+          <a:p>
+            <a:pPr algn="ctr"/>
+          </a:p>
+        </p:txBody>
+      </p:sp>
+      <p:sp>
+        <p:nvSpPr>
+          <p:cNvPr id="29" name="Rectangle 28"/>
+          <p:cNvSpPr/>
+          <p:nvPr/>
+        </p:nvSpPr>
+        <p:spPr>
+          <a:xfrm>
+            <a:off x="8724900" y="3886200"/>
+            <a:ext cx="1714500" cy="114300"/>
+          </a:xfrm>
+          <a:prstGeom prst="rect">
+            <a:avLst/>
+          </a:prstGeom>
+          <a:solidFill>
+            <a:srgbClr val="3E6FB0"/>
+          </a:solidFill>
+          <a:ln>
+            <a:noFill/>
+          </a:ln>
+          <a:effectLst/>
+        </p:spPr>
+        <p:style>
+          <a:lnRef idx="1">
+            <a:schemeClr val="accent1"/>
+          </a:lnRef>
+          <a:fillRef idx="3">
+            <a:schemeClr val="accent1"/>
+          </a:fillRef>
+          <a:effectRef idx="2">
+            <a:schemeClr val="accent1"/>
+          </a:effectRef>
+          <a:fontRef idx="minor">
+            <a:schemeClr val="lt1"/>
+          </a:fontRef>
+        </p:style>
+        <p:txBody>
+          <a:bodyPr rtlCol="0" anchor="ctr"/>
+          <a:lstStyle/>
+          <a:p>
+            <a:pPr algn="ctr"/>
+          </a:p>
+        </p:txBody>
+      </p:sp>
+      <p:sp>
+        <p:nvSpPr>
+          <p:cNvPr id="30" name="TextBox 29"/>
+          <p:cNvSpPr txBox="1"/>
+          <p:nvPr/>
+        </p:nvSpPr>
+        <p:spPr>
+          <a:xfrm>
+            <a:off x="10515600" y="3867150"/>
+            <a:ext cx="1047750" cy="152400"/>
+          </a:xfrm>
+          <a:prstGeom prst="rect">
+            <a:avLst/>
+          </a:prstGeom>
+          <a:noFill/>
+        </p:spPr>
+        <p:txBody>
+          <a:bodyPr wrap="square" anchor="t" lIns="0" rIns="0" tIns="0" bIns="0">
+            <a:spAutoFit/>
+          </a:bodyPr>
+          <a:lstStyle/>
+          <a:p>
+            <a:pPr algn="l">
+              <a:lnSpc>
+                <a:spcPct val="106000"/>
+              </a:lnSpc>
+            </a:pPr>
+            <a:r>
+              <a:rPr sz="950" b="1">
+                <a:solidFill>
+                  <a:srgbClr val="182238"/>
+                </a:solidFill>
+                <a:latin typeface="Aptos"/>
+              </a:rPr>
+              <a:t>65 h · 14 dias</a:t>
+            </a:r>
+          </a:p>
+        </p:txBody>
+      </p:sp>
+      <p:sp>
+        <p:nvSpPr>
+          <p:cNvPr id="31" name="TextBox 30"/>
+          <p:cNvSpPr txBox="1"/>
+          <p:nvPr/>
+        </p:nvSpPr>
+        <p:spPr>
+          <a:xfrm>
+            <a:off x="7258050" y="4114800"/>
+            <a:ext cx="1428750" cy="152400"/>
+          </a:xfrm>
+          <a:prstGeom prst="rect">
+            <a:avLst/>
+          </a:prstGeom>
+          <a:noFill/>
+        </p:spPr>
+        <p:txBody>
+          <a:bodyPr wrap="square" anchor="t" lIns="0" rIns="0" tIns="0" bIns="0">
+            <a:spAutoFit/>
+          </a:bodyPr>
+          <a:lstStyle/>
+          <a:p>
+            <a:pPr algn="l">
+              <a:lnSpc>
+                <a:spcPct val="106000"/>
+              </a:lnSpc>
+            </a:pPr>
+            <a:r>
+              <a:rPr sz="1000" b="0">
+                <a:solidFill>
+                  <a:srgbClr val="182238"/>
+                </a:solidFill>
+                <a:latin typeface="Aptos"/>
+              </a:rPr>
+              <a:t>Vitor Hugo</a:t>
+            </a:r>
+          </a:p>
+        </p:txBody>
+      </p:sp>
+      <p:sp>
+        <p:nvSpPr>
+          <p:cNvPr id="32" name="Rectangle 31"/>
+          <p:cNvSpPr/>
+          <p:nvPr/>
+        </p:nvSpPr>
+        <p:spPr>
+          <a:xfrm>
+            <a:off x="8724900" y="4133850"/>
+            <a:ext cx="1714500" cy="114300"/>
+          </a:xfrm>
+          <a:prstGeom prst="rect">
+            <a:avLst/>
+          </a:prstGeom>
+          <a:solidFill>
+            <a:srgbClr val="E7EDF5"/>
+          </a:solidFill>
+          <a:ln>
+            <a:noFill/>
+          </a:ln>
+          <a:effectLst/>
+        </p:spPr>
+        <p:style>
+          <a:lnRef idx="1">
+            <a:schemeClr val="accent1"/>
+          </a:lnRef>
+          <a:fillRef idx="3">
+            <a:schemeClr val="accent1"/>
+          </a:fillRef>
+          <a:effectRef idx="2">
+            <a:schemeClr val="accent1"/>
+          </a:effectRef>
+          <a:fontRef idx="minor">
+            <a:schemeClr val="lt1"/>
+          </a:fontRef>
+        </p:style>
+        <p:txBody>
+          <a:bodyPr rtlCol="0" anchor="ctr"/>
+          <a:lstStyle/>
+          <a:p>
+            <a:pPr algn="ctr"/>
+          </a:p>
+        </p:txBody>
+      </p:sp>
+      <p:sp>
+        <p:nvSpPr>
+          <p:cNvPr id="33" name="Rectangle 32"/>
+          <p:cNvSpPr/>
+          <p:nvPr/>
+        </p:nvSpPr>
+        <p:spPr>
+          <a:xfrm>
+            <a:off x="8724900" y="4133850"/>
+            <a:ext cx="1654111" cy="114300"/>
+          </a:xfrm>
+          <a:prstGeom prst="rect">
+            <a:avLst/>
+          </a:prstGeom>
+          <a:solidFill>
+            <a:srgbClr val="3E6FB0"/>
+          </a:solidFill>
+          <a:ln>
+            <a:noFill/>
+          </a:ln>
+          <a:effectLst/>
+        </p:spPr>
+        <p:style>
+          <a:lnRef idx="1">
+            <a:schemeClr val="accent1"/>
+          </a:lnRef>
+          <a:fillRef idx="3">
+            <a:schemeClr val="accent1"/>
+          </a:fillRef>
+          <a:effectRef idx="2">
+            <a:schemeClr val="accent1"/>
+          </a:effectRef>
+          <a:fontRef idx="minor">
+            <a:schemeClr val="lt1"/>
+          </a:fontRef>
+        </p:style>
+        <p:txBody>
+          <a:bodyPr rtlCol="0" anchor="ctr"/>
+          <a:lstStyle/>
+          <a:p>
+            <a:pPr algn="ctr"/>
+          </a:p>
+        </p:txBody>
+      </p:sp>
+      <p:sp>
+        <p:nvSpPr>
+          <p:cNvPr id="34" name="TextBox 33"/>
+          <p:cNvSpPr txBox="1"/>
+          <p:nvPr/>
+        </p:nvSpPr>
+        <p:spPr>
+          <a:xfrm>
+            <a:off x="10515600" y="4114800"/>
+            <a:ext cx="1047750" cy="152400"/>
+          </a:xfrm>
+          <a:prstGeom prst="rect">
+            <a:avLst/>
+          </a:prstGeom>
+          <a:noFill/>
+        </p:spPr>
+        <p:txBody>
+          <a:bodyPr wrap="square" anchor="t" lIns="0" rIns="0" tIns="0" bIns="0">
+            <a:spAutoFit/>
+          </a:bodyPr>
+          <a:lstStyle/>
+          <a:p>
+            <a:pPr algn="l">
+              <a:lnSpc>
+                <a:spcPct val="106000"/>
+              </a:lnSpc>
+            </a:pPr>
+            <a:r>
+              <a:rPr sz="950" b="1">
+                <a:solidFill>
+                  <a:srgbClr val="182238"/>
+                </a:solidFill>
+                <a:latin typeface="Aptos"/>
+              </a:rPr>
+              <a:t>63 h · 10 dias</a:t>
+            </a:r>
+          </a:p>
+        </p:txBody>
+      </p:sp>
+      <p:sp>
+        <p:nvSpPr>
+          <p:cNvPr id="35" name="TextBox 34"/>
+          <p:cNvSpPr txBox="1"/>
+          <p:nvPr/>
+        </p:nvSpPr>
+        <p:spPr>
+          <a:xfrm>
+            <a:off x="7258050" y="4362450"/>
+            <a:ext cx="1428750" cy="152400"/>
+          </a:xfrm>
+          <a:prstGeom prst="rect">
+            <a:avLst/>
+          </a:prstGeom>
+          <a:noFill/>
+        </p:spPr>
+        <p:txBody>
+          <a:bodyPr wrap="square" anchor="t" lIns="0" rIns="0" tIns="0" bIns="0">
+            <a:spAutoFit/>
+          </a:bodyPr>
+          <a:lstStyle/>
+          <a:p>
+            <a:pPr algn="l">
+              <a:lnSpc>
+                <a:spcPct val="106000"/>
+              </a:lnSpc>
+            </a:pPr>
+            <a:r>
+              <a:rPr sz="1000" b="0">
+                <a:solidFill>
+                  <a:srgbClr val="182238"/>
+                </a:solidFill>
+                <a:latin typeface="Aptos"/>
+              </a:rPr>
+              <a:t>Jose</a:t>
+            </a:r>
+          </a:p>
+        </p:txBody>
+      </p:sp>
+      <p:sp>
+        <p:nvSpPr>
+          <p:cNvPr id="36" name="Rectangle 35"/>
+          <p:cNvSpPr/>
+          <p:nvPr/>
+        </p:nvSpPr>
+        <p:spPr>
+          <a:xfrm>
+            <a:off x="8724900" y="4381500"/>
+            <a:ext cx="1714500" cy="114300"/>
+          </a:xfrm>
+          <a:prstGeom prst="rect">
+            <a:avLst/>
+          </a:prstGeom>
+          <a:solidFill>
+            <a:srgbClr val="E7EDF5"/>
+          </a:solidFill>
+          <a:ln>
+            <a:noFill/>
+          </a:ln>
+          <a:effectLst/>
+        </p:spPr>
+        <p:style>
+          <a:lnRef idx="1">
+            <a:schemeClr val="accent1"/>
+          </a:lnRef>
+          <a:fillRef idx="3">
+            <a:schemeClr val="accent1"/>
+          </a:fillRef>
+          <a:effectRef idx="2">
+            <a:schemeClr val="accent1"/>
+          </a:effectRef>
+          <a:fontRef idx="minor">
+            <a:schemeClr val="lt1"/>
+          </a:fontRef>
+        </p:style>
+        <p:txBody>
+          <a:bodyPr rtlCol="0" anchor="ctr"/>
+          <a:lstStyle/>
+          <a:p>
+            <a:pPr algn="ctr"/>
+          </a:p>
+        </p:txBody>
+      </p:sp>
+      <p:sp>
+        <p:nvSpPr>
+          <p:cNvPr id="37" name="Rectangle 36"/>
+          <p:cNvSpPr/>
+          <p:nvPr/>
+        </p:nvSpPr>
+        <p:spPr>
+          <a:xfrm>
+            <a:off x="8724900" y="4381500"/>
+            <a:ext cx="1614728" cy="114300"/>
+          </a:xfrm>
+          <a:prstGeom prst="rect">
+            <a:avLst/>
+          </a:prstGeom>
+          <a:solidFill>
+            <a:srgbClr val="3E6FB0"/>
+          </a:solidFill>
+          <a:ln>
+            <a:noFill/>
+          </a:ln>
+          <a:effectLst/>
+        </p:spPr>
+        <p:style>
+          <a:lnRef idx="1">
+            <a:schemeClr val="accent1"/>
+          </a:lnRef>
+          <a:fillRef idx="3">
+            <a:schemeClr val="accent1"/>
+          </a:fillRef>
+          <a:effectRef idx="2">
+            <a:schemeClr val="accent1"/>
+          </a:effectRef>
+          <a:fontRef idx="minor">
+            <a:schemeClr val="lt1"/>
+          </a:fontRef>
+        </p:style>
+        <p:txBody>
+          <a:bodyPr rtlCol="0" anchor="ctr"/>
+          <a:lstStyle/>
+          <a:p>
+            <a:pPr algn="ctr"/>
+          </a:p>
+        </p:txBody>
+      </p:sp>
+      <p:sp>
+        <p:nvSpPr>
+          <p:cNvPr id="38" name="TextBox 37"/>
+          <p:cNvSpPr txBox="1"/>
+          <p:nvPr/>
+        </p:nvSpPr>
+        <p:spPr>
+          <a:xfrm>
+            <a:off x="10515600" y="4362450"/>
+            <a:ext cx="1047750" cy="152400"/>
+          </a:xfrm>
+          <a:prstGeom prst="rect">
+            <a:avLst/>
+          </a:prstGeom>
+          <a:noFill/>
+        </p:spPr>
+        <p:txBody>
+          <a:bodyPr wrap="square" anchor="t" lIns="0" rIns="0" tIns="0" bIns="0">
+            <a:spAutoFit/>
+          </a:bodyPr>
+          <a:lstStyle/>
+          <a:p>
+            <a:pPr algn="l">
+              <a:lnSpc>
+                <a:spcPct val="106000"/>
+              </a:lnSpc>
+            </a:pPr>
+            <a:r>
+              <a:rPr sz="950" b="1">
+                <a:solidFill>
+                  <a:srgbClr val="182238"/>
+                </a:solidFill>
+                <a:latin typeface="Aptos"/>
+              </a:rPr>
+              <a:t>62 h · 12 dias</a:t>
+            </a:r>
+          </a:p>
+        </p:txBody>
+      </p:sp>
+      <p:sp>
+        <p:nvSpPr>
+          <p:cNvPr id="39" name="TextBox 38"/>
+          <p:cNvSpPr txBox="1"/>
+          <p:nvPr/>
+        </p:nvSpPr>
+        <p:spPr>
+          <a:xfrm>
+            <a:off x="7258050" y="4610100"/>
+            <a:ext cx="1428750" cy="152400"/>
+          </a:xfrm>
+          <a:prstGeom prst="rect">
+            <a:avLst/>
+          </a:prstGeom>
+          <a:noFill/>
+        </p:spPr>
+        <p:txBody>
+          <a:bodyPr wrap="square" anchor="t" lIns="0" rIns="0" tIns="0" bIns="0">
+            <a:spAutoFit/>
+          </a:bodyPr>
+          <a:lstStyle/>
+          <a:p>
+            <a:pPr algn="l">
+              <a:lnSpc>
+                <a:spcPct val="106000"/>
+              </a:lnSpc>
+            </a:pPr>
+            <a:r>
+              <a:rPr sz="1000" b="0">
+                <a:solidFill>
+                  <a:srgbClr val="182238"/>
+                </a:solidFill>
+                <a:latin typeface="Aptos"/>
+              </a:rPr>
+              <a:t>Tiago Alves</a:t>
+            </a:r>
+          </a:p>
+        </p:txBody>
+      </p:sp>
+      <p:sp>
+        <p:nvSpPr>
+          <p:cNvPr id="40" name="Rectangle 39"/>
+          <p:cNvSpPr/>
+          <p:nvPr/>
+        </p:nvSpPr>
+        <p:spPr>
+          <a:xfrm>
+            <a:off x="8724900" y="4629150"/>
+            <a:ext cx="1714500" cy="114300"/>
+          </a:xfrm>
+          <a:prstGeom prst="rect">
+            <a:avLst/>
+          </a:prstGeom>
+          <a:solidFill>
+            <a:srgbClr val="E7EDF5"/>
+          </a:solidFill>
+          <a:ln>
+            <a:noFill/>
+          </a:ln>
+          <a:effectLst/>
+        </p:spPr>
+        <p:style>
+          <a:lnRef idx="1">
+            <a:schemeClr val="accent1"/>
+          </a:lnRef>
+          <a:fillRef idx="3">
+            <a:schemeClr val="accent1"/>
+          </a:fillRef>
+          <a:effectRef idx="2">
+            <a:schemeClr val="accent1"/>
+          </a:effectRef>
+          <a:fontRef idx="minor">
+            <a:schemeClr val="lt1"/>
+          </a:fontRef>
+        </p:style>
+        <p:txBody>
+          <a:bodyPr rtlCol="0" anchor="ctr"/>
+          <a:lstStyle/>
+          <a:p>
+            <a:pPr algn="ctr"/>
+          </a:p>
+        </p:txBody>
+      </p:sp>
+      <p:sp>
+        <p:nvSpPr>
+          <p:cNvPr id="41" name="Rectangle 40"/>
+          <p:cNvSpPr/>
+          <p:nvPr/>
+        </p:nvSpPr>
+        <p:spPr>
+          <a:xfrm>
+            <a:off x="8724900" y="4629150"/>
+            <a:ext cx="1609477" cy="114300"/>
+          </a:xfrm>
+          <a:prstGeom prst="rect">
+            <a:avLst/>
+          </a:prstGeom>
+          <a:solidFill>
+            <a:srgbClr val="3E6FB0"/>
+          </a:solidFill>
+          <a:ln>
+            <a:noFill/>
+          </a:ln>
+          <a:effectLst/>
+        </p:spPr>
+        <p:style>
+          <a:lnRef idx="1">
+            <a:schemeClr val="accent1"/>
+          </a:lnRef>
+          <a:fillRef idx="3">
+            <a:schemeClr val="accent1"/>
+          </a:fillRef>
+          <a:effectRef idx="2">
+            <a:schemeClr val="accent1"/>
+          </a:effectRef>
+          <a:fontRef idx="minor">
+            <a:schemeClr val="lt1"/>
+          </a:fontRef>
+        </p:style>
+        <p:txBody>
+          <a:bodyPr rtlCol="0" anchor="ctr"/>
+          <a:lstStyle/>
+          <a:p>
+            <a:pPr algn="ctr"/>
+          </a:p>
+        </p:txBody>
+      </p:sp>
+      <p:sp>
+        <p:nvSpPr>
+          <p:cNvPr id="42" name="TextBox 41"/>
+          <p:cNvSpPr txBox="1"/>
+          <p:nvPr/>
+        </p:nvSpPr>
+        <p:spPr>
+          <a:xfrm>
+            <a:off x="10515600" y="4610100"/>
+            <a:ext cx="1047750" cy="152400"/>
+          </a:xfrm>
+          <a:prstGeom prst="rect">
+            <a:avLst/>
+          </a:prstGeom>
+          <a:noFill/>
+        </p:spPr>
+        <p:txBody>
+          <a:bodyPr wrap="square" anchor="t" lIns="0" rIns="0" tIns="0" bIns="0">
+            <a:spAutoFit/>
+          </a:bodyPr>
+          <a:lstStyle/>
+          <a:p>
+            <a:pPr algn="l">
+              <a:lnSpc>
+                <a:spcPct val="106000"/>
+              </a:lnSpc>
+            </a:pPr>
+            <a:r>
+              <a:rPr sz="950" b="1">
+                <a:solidFill>
+                  <a:srgbClr val="182238"/>
+                </a:solidFill>
+                <a:latin typeface="Aptos"/>
+              </a:rPr>
+              <a:t>61 h · 10 dias</a:t>
+            </a:r>
+          </a:p>
+        </p:txBody>
+      </p:sp>
+      <p:sp>
+        <p:nvSpPr>
+          <p:cNvPr id="43" name="TextBox 42"/>
+          <p:cNvSpPr txBox="1"/>
+          <p:nvPr/>
+        </p:nvSpPr>
+        <p:spPr>
+          <a:xfrm>
+            <a:off x="7258050" y="4857750"/>
+            <a:ext cx="1428750" cy="152400"/>
+          </a:xfrm>
+          <a:prstGeom prst="rect">
+            <a:avLst/>
+          </a:prstGeom>
+          <a:noFill/>
+        </p:spPr>
+        <p:txBody>
+          <a:bodyPr wrap="square" anchor="t" lIns="0" rIns="0" tIns="0" bIns="0">
+            <a:spAutoFit/>
+          </a:bodyPr>
+          <a:lstStyle/>
+          <a:p>
+            <a:pPr algn="l">
+              <a:lnSpc>
+                <a:spcPct val="106000"/>
+              </a:lnSpc>
+            </a:pPr>
+            <a:r>
+              <a:rPr sz="1000" b="0">
+                <a:solidFill>
+                  <a:srgbClr val="182238"/>
+                </a:solidFill>
+                <a:latin typeface="Aptos"/>
+              </a:rPr>
+              <a:t>Tarcilio Mendes</a:t>
+            </a:r>
+          </a:p>
+        </p:txBody>
+      </p:sp>
+      <p:sp>
+        <p:nvSpPr>
+          <p:cNvPr id="44" name="Rectangle 43"/>
+          <p:cNvSpPr/>
+          <p:nvPr/>
+        </p:nvSpPr>
+        <p:spPr>
+          <a:xfrm>
+            <a:off x="8724900" y="4876800"/>
+            <a:ext cx="1714500" cy="114300"/>
+          </a:xfrm>
+          <a:prstGeom prst="rect">
+            <a:avLst/>
+          </a:prstGeom>
+          <a:solidFill>
+            <a:srgbClr val="E7EDF5"/>
+          </a:solidFill>
+          <a:ln>
+            <a:noFill/>
+          </a:ln>
+          <a:effectLst/>
+        </p:spPr>
+        <p:style>
+          <a:lnRef idx="1">
+            <a:schemeClr val="accent1"/>
+          </a:lnRef>
+          <a:fillRef idx="3">
+            <a:schemeClr val="accent1"/>
+          </a:fillRef>
+          <a:effectRef idx="2">
+            <a:schemeClr val="accent1"/>
+          </a:effectRef>
+          <a:fontRef idx="minor">
+            <a:schemeClr val="lt1"/>
+          </a:fontRef>
+        </p:style>
+        <p:txBody>
+          <a:bodyPr rtlCol="0" anchor="ctr"/>
+          <a:lstStyle/>
+          <a:p>
+            <a:pPr algn="ctr"/>
+          </a:p>
+        </p:txBody>
+      </p:sp>
+      <p:sp>
+        <p:nvSpPr>
+          <p:cNvPr id="45" name="Rectangle 44"/>
+          <p:cNvSpPr/>
+          <p:nvPr/>
+        </p:nvSpPr>
+        <p:spPr>
+          <a:xfrm>
+            <a:off x="8724900" y="4876800"/>
+            <a:ext cx="1606851" cy="114300"/>
+          </a:xfrm>
+          <a:prstGeom prst="rect">
+            <a:avLst/>
+          </a:prstGeom>
+          <a:solidFill>
+            <a:srgbClr val="3E6FB0"/>
+          </a:solidFill>
+          <a:ln>
+            <a:noFill/>
+          </a:ln>
+          <a:effectLst/>
+        </p:spPr>
+        <p:style>
+          <a:lnRef idx="1">
+            <a:schemeClr val="accent1"/>
+          </a:lnRef>
+          <a:fillRef idx="3">
+            <a:schemeClr val="accent1"/>
+          </a:fillRef>
+          <a:effectRef idx="2">
+            <a:schemeClr val="accent1"/>
+          </a:effectRef>
+          <a:fontRef idx="minor">
+            <a:schemeClr val="lt1"/>
+          </a:fontRef>
+        </p:style>
+        <p:txBody>
+          <a:bodyPr rtlCol="0" anchor="ctr"/>
+          <a:lstStyle/>
+          <a:p>
+            <a:pPr algn="ctr"/>
+          </a:p>
+        </p:txBody>
+      </p:sp>
+      <p:sp>
+        <p:nvSpPr>
+          <p:cNvPr id="46" name="TextBox 45"/>
+          <p:cNvSpPr txBox="1"/>
+          <p:nvPr/>
+        </p:nvSpPr>
+        <p:spPr>
+          <a:xfrm>
+            <a:off x="10515600" y="4857750"/>
+            <a:ext cx="1047750" cy="152400"/>
+          </a:xfrm>
+          <a:prstGeom prst="rect">
+            <a:avLst/>
+          </a:prstGeom>
+          <a:noFill/>
+        </p:spPr>
+        <p:txBody>
+          <a:bodyPr wrap="square" anchor="t" lIns="0" rIns="0" tIns="0" bIns="0">
+            <a:spAutoFit/>
+          </a:bodyPr>
+          <a:lstStyle/>
+          <a:p>
+            <a:pPr algn="l">
+              <a:lnSpc>
+                <a:spcPct val="106000"/>
+              </a:lnSpc>
+            </a:pPr>
+            <a:r>
+              <a:rPr sz="950" b="1">
+                <a:solidFill>
+                  <a:srgbClr val="182238"/>
+                </a:solidFill>
+                <a:latin typeface="Aptos"/>
+              </a:rPr>
+              <a:t>61 h · 15 dias</a:t>
+            </a:r>
+          </a:p>
+        </p:txBody>
+      </p:sp>
+      <p:sp>
+        <p:nvSpPr>
+          <p:cNvPr id="47" name="TextBox 46"/>
+          <p:cNvSpPr txBox="1"/>
+          <p:nvPr/>
+        </p:nvSpPr>
+        <p:spPr>
+          <a:xfrm>
+            <a:off x="7258050" y="5143500"/>
+            <a:ext cx="4191000" cy="171450"/>
+          </a:xfrm>
+          <a:prstGeom prst="rect">
+            <a:avLst/>
+          </a:prstGeom>
+          <a:noFill/>
+        </p:spPr>
+        <p:txBody>
+          <a:bodyPr wrap="square" anchor="t" lIns="0" rIns="0" tIns="0" bIns="0">
+            <a:spAutoFit/>
+          </a:bodyPr>
+          <a:lstStyle/>
+          <a:p>
+            <a:pPr algn="l">
+              <a:lnSpc>
+                <a:spcPct val="106000"/>
+              </a:lnSpc>
+            </a:pPr>
+            <a:r>
+              <a:rPr sz="1000" b="0">
+                <a:solidFill>
+                  <a:srgbClr val="667085"/>
+                </a:solidFill>
+                <a:latin typeface="Aptos"/>
+              </a:rPr>
+              <a:t>Formalizar o turno primeiro para esse grupo: a demanda já é diária e comprovada.</a:t>
+            </a:r>
+          </a:p>
+        </p:txBody>
+      </p:sp>
+    </p:spTree>
+  </p:cSld>
+  <p:clrMapOvr>
+    <a:masterClrMapping/>
+  </p:clrMapOvr>
+</p:sld>
+</file>
+
+<file path=ppt/slides/slide5.xml><?xml version="1.0" encoding="utf-8"?>
+<p:sld xmlns:a="http://schemas.openxmlformats.org/drawingml/2006/main" xmlns:p="http://schemas.openxmlformats.org/presentationml/2006/main" xmlns:r="http://schemas.openxmlformats.org/officeDocument/2006/relationships">
+  <p:cSld>
+    <p:spTree>
+      <p:nvGrpSpPr>
+        <p:cNvPr id="1" name=""/>
+        <p:cNvGrpSpPr/>
+        <p:nvPr/>
+      </p:nvGrpSpPr>
+      <p:grpSpPr/>
+      <p:sp>
+        <p:nvSpPr>
+          <p:cNvPr id="2" name="Rectangle 1"/>
+          <p:cNvSpPr/>
+          <p:nvPr/>
+        </p:nvSpPr>
+        <p:spPr>
+          <a:xfrm>
+            <a:off x="0" y="0"/>
+            <a:ext cx="10477500" cy="76200"/>
+          </a:xfrm>
+          <a:prstGeom prst="rect">
+            <a:avLst/>
+          </a:prstGeom>
+          <a:solidFill>
+            <a:srgbClr val="081551"/>
+          </a:solidFill>
+          <a:ln>
+            <a:noFill/>
+          </a:ln>
+          <a:effectLst/>
+        </p:spPr>
+        <p:style>
+          <a:lnRef idx="1">
+            <a:schemeClr val="accent1"/>
+          </a:lnRef>
+          <a:fillRef idx="3">
+            <a:schemeClr val="accent1"/>
+          </a:fillRef>
+          <a:effectRef idx="2">
+            <a:schemeClr val="accent1"/>
+          </a:effectRef>
+          <a:fontRef idx="minor">
+            <a:schemeClr val="lt1"/>
+          </a:fontRef>
+        </p:style>
+        <p:txBody>
+          <a:bodyPr rtlCol="0" anchor="ctr"/>
+          <a:lstStyle/>
+          <a:p>
+            <a:pPr algn="ctr"/>
+          </a:p>
+        </p:txBody>
+      </p:sp>
+      <p:sp>
+        <p:nvSpPr>
+          <p:cNvPr id="3" name="Rectangle 2"/>
+          <p:cNvSpPr/>
+          <p:nvPr/>
+        </p:nvSpPr>
+        <p:spPr>
+          <a:xfrm>
+            <a:off x="10477500" y="0"/>
+            <a:ext cx="1714500" cy="76200"/>
+          </a:xfrm>
+          <a:prstGeom prst="rect">
+            <a:avLst/>
+          </a:prstGeom>
+          <a:solidFill>
+            <a:srgbClr val="42DF4B"/>
+          </a:solidFill>
+          <a:ln>
+            <a:noFill/>
+          </a:ln>
+          <a:effectLst/>
+        </p:spPr>
+        <p:style>
+          <a:lnRef idx="1">
+            <a:schemeClr val="accent1"/>
+          </a:lnRef>
+          <a:fillRef idx="3">
+            <a:schemeClr val="accent1"/>
+          </a:fillRef>
+          <a:effectRef idx="2">
+            <a:schemeClr val="accent1"/>
+          </a:effectRef>
+          <a:fontRef idx="minor">
+            <a:schemeClr val="lt1"/>
+          </a:fontRef>
+        </p:style>
+        <p:txBody>
+          <a:bodyPr rtlCol="0" anchor="ctr"/>
+          <a:lstStyle/>
+          <a:p>
+            <a:pPr algn="ctr"/>
+          </a:p>
+        </p:txBody>
+      </p:sp>
+      <p:sp>
+        <p:nvSpPr>
+          <p:cNvPr id="4" name="TextBox 3"/>
+          <p:cNvSpPr txBox="1"/>
+          <p:nvPr/>
+        </p:nvSpPr>
+        <p:spPr>
+          <a:xfrm>
+            <a:off x="10382250" y="285750"/>
+            <a:ext cx="1238250" cy="342900"/>
+          </a:xfrm>
+          <a:prstGeom prst="rect">
+            <a:avLst/>
+          </a:prstGeom>
+          <a:noFill/>
+        </p:spPr>
+        <p:txBody>
+          <a:bodyPr wrap="square" anchor="t" lIns="0" rIns="0" tIns="0" bIns="0">
+            <a:spAutoFit/>
+          </a:bodyPr>
+          <a:lstStyle/>
+          <a:p>
+            <a:pPr algn="r">
+              <a:lnSpc>
+                <a:spcPct val="106000"/>
+              </a:lnSpc>
+            </a:pPr>
+            <a:r>
+              <a:rPr sz="2700" b="0">
+                <a:solidFill>
+                  <a:srgbClr val="081551"/>
+                </a:solidFill>
+                <a:latin typeface="Aptos Display"/>
+              </a:rPr>
+              <a:t>alloha</a:t>
+            </a:r>
+          </a:p>
+        </p:txBody>
+      </p:sp>
+      <p:sp>
+        <p:nvSpPr>
+          <p:cNvPr id="5" name="TextBox 4"/>
+          <p:cNvSpPr txBox="1"/>
+          <p:nvPr/>
+        </p:nvSpPr>
+        <p:spPr>
+          <a:xfrm>
+            <a:off x="10382250" y="628650"/>
+            <a:ext cx="1238250" cy="133350"/>
+          </a:xfrm>
+          <a:prstGeom prst="rect">
+            <a:avLst/>
+          </a:prstGeom>
+          <a:noFill/>
+        </p:spPr>
+        <p:txBody>
+          <a:bodyPr wrap="square" anchor="t" lIns="0" rIns="0" tIns="0" bIns="0">
+            <a:spAutoFit/>
+          </a:bodyPr>
+          <a:lstStyle/>
+          <a:p>
+            <a:pPr algn="r">
+              <a:lnSpc>
+                <a:spcPct val="106000"/>
+              </a:lnSpc>
+            </a:pPr>
+            <a:r>
+              <a:rPr sz="800" b="1">
+                <a:solidFill>
+                  <a:srgbClr val="13853A"/>
+                </a:solidFill>
+                <a:latin typeface="Aptos"/>
+              </a:rPr>
+              <a:t>F I B R A</a:t>
+            </a:r>
+          </a:p>
+        </p:txBody>
+      </p:sp>
+      <p:sp>
+        <p:nvSpPr>
+          <p:cNvPr id="6" name="TextBox 5"/>
+          <p:cNvSpPr txBox="1"/>
+          <p:nvPr/>
+        </p:nvSpPr>
+        <p:spPr>
+          <a:xfrm>
+            <a:off x="533400" y="6572250"/>
+            <a:ext cx="9906000" cy="152400"/>
+          </a:xfrm>
+          <a:prstGeom prst="rect">
+            <a:avLst/>
+          </a:prstGeom>
+          <a:noFill/>
+        </p:spPr>
+        <p:txBody>
+          <a:bodyPr wrap="square" anchor="t" lIns="0" rIns="0" tIns="0" bIns="0">
+            <a:spAutoFit/>
+          </a:bodyPr>
+          <a:lstStyle/>
+          <a:p>
+            <a:pPr algn="l">
+              <a:lnSpc>
+                <a:spcPct val="106000"/>
+              </a:lnSpc>
+            </a:pPr>
+            <a:r>
+              <a:rPr sz="900" b="0">
+                <a:solidFill>
+                  <a:srgbClr val="8B94A6"/>
+                </a:solidFill>
+                <a:latin typeface="Aptos"/>
+              </a:rPr>
+              <a:t>HUB de Horas Extras · Power BI · R7.2 - NORTE: AP / MA / PA E PI · foto de 10/07/2026</a:t>
+            </a:r>
+          </a:p>
+        </p:txBody>
+      </p:sp>
+      <p:sp>
+        <p:nvSpPr>
+          <p:cNvPr id="7" name="TextBox 6"/>
+          <p:cNvSpPr txBox="1"/>
+          <p:nvPr/>
+        </p:nvSpPr>
+        <p:spPr>
+          <a:xfrm>
+            <a:off x="10953750" y="6572250"/>
+            <a:ext cx="704850" cy="152400"/>
+          </a:xfrm>
+          <a:prstGeom prst="rect">
+            <a:avLst/>
+          </a:prstGeom>
+          <a:noFill/>
+        </p:spPr>
+        <p:txBody>
+          <a:bodyPr wrap="square" anchor="t" lIns="0" rIns="0" tIns="0" bIns="0">
+            <a:spAutoFit/>
+          </a:bodyPr>
+          <a:lstStyle/>
+          <a:p>
+            <a:pPr algn="r">
+              <a:lnSpc>
+                <a:spcPct val="106000"/>
+              </a:lnSpc>
+            </a:pPr>
+            <a:r>
+              <a:rPr sz="900" b="0">
+                <a:solidFill>
+                  <a:srgbClr val="8B94A6"/>
+                </a:solidFill>
+                <a:latin typeface="Aptos"/>
+              </a:rPr>
+              <a:t>5 / 5</a:t>
+            </a:r>
+          </a:p>
+        </p:txBody>
+      </p:sp>
+      <p:sp>
+        <p:nvSpPr>
+          <p:cNvPr id="8" name="TextBox 7"/>
+          <p:cNvSpPr txBox="1"/>
+          <p:nvPr/>
+        </p:nvSpPr>
+        <p:spPr>
+          <a:xfrm>
+            <a:off x="533400" y="323850"/>
+            <a:ext cx="9334500" cy="190500"/>
+          </a:xfrm>
+          <a:prstGeom prst="rect">
+            <a:avLst/>
+          </a:prstGeom>
+          <a:noFill/>
+        </p:spPr>
+        <p:txBody>
+          <a:bodyPr wrap="square" anchor="t" lIns="0" rIns="0" tIns="0" bIns="0">
+            <a:spAutoFit/>
+          </a:bodyPr>
+          <a:lstStyle/>
+          <a:p>
+            <a:pPr algn="l">
+              <a:lnSpc>
+                <a:spcPct val="106000"/>
+              </a:lnSpc>
+            </a:pPr>
+            <a:r>
+              <a:rPr sz="1200" b="1">
+                <a:solidFill>
+                  <a:srgbClr val="1476C9"/>
+                </a:solidFill>
+                <a:latin typeface="Aptos"/>
+              </a:rPr>
+              <a:t>PROPOSTA DO PRÓXIMO CICLO · FCA</a:t>
+            </a:r>
+          </a:p>
+        </p:txBody>
+      </p:sp>
+      <p:sp>
+        <p:nvSpPr>
+          <p:cNvPr id="9" name="TextBox 8"/>
+          <p:cNvSpPr txBox="1"/>
+          <p:nvPr/>
+        </p:nvSpPr>
+        <p:spPr>
+          <a:xfrm>
+            <a:off x="533400" y="552450"/>
+            <a:ext cx="10001250" cy="723900"/>
+          </a:xfrm>
+          <a:prstGeom prst="rect">
+            <a:avLst/>
+          </a:prstGeom>
+          <a:noFill/>
+        </p:spPr>
+        <p:txBody>
+          <a:bodyPr wrap="square" anchor="t" lIns="0" rIns="0" tIns="0" bIns="0">
+            <a:spAutoFit/>
+          </a:bodyPr>
+          <a:lstStyle/>
+          <a:p>
+            <a:pPr algn="l">
+              <a:lnSpc>
+                <a:spcPct val="100000"/>
+              </a:lnSpc>
+            </a:pPr>
+            <a:r>
+              <a:rPr sz="2700" b="1">
+                <a:solidFill>
+                  <a:srgbClr val="081551"/>
+                </a:solidFill>
+                <a:latin typeface="Aptos Display"/>
+              </a:rPr>
+              <a:t>Fechar o gap de R$ 42,4 mil/mês com ações específicas por área — não com corte cego</a:t>
+            </a:r>
+          </a:p>
+        </p:txBody>
+      </p:sp>
+      <p:sp>
+        <p:nvSpPr>
+          <p:cNvPr id="10" name="Rounded Rectangle 9"/>
+          <p:cNvSpPr/>
+          <p:nvPr/>
+        </p:nvSpPr>
+        <p:spPr>
+          <a:xfrm>
+            <a:off x="533400" y="1428750"/>
+            <a:ext cx="3429000" cy="1428750"/>
+          </a:xfrm>
+          <a:prstGeom prst="roundRect">
+            <a:avLst>
+              <a:gd name="adj" fmla="val 6000"/>
+            </a:avLst>
+          </a:prstGeom>
+          <a:solidFill>
+            <a:srgbClr val="FFFFFF"/>
+          </a:solidFill>
+          <a:ln w="12700">
+            <a:solidFill>
+              <a:srgbClr val="D9E0EA"/>
+            </a:solidFill>
+          </a:ln>
+          <a:effectLst/>
+        </p:spPr>
+        <p:style>
+          <a:lnRef idx="1">
+            <a:schemeClr val="accent1"/>
+          </a:lnRef>
+          <a:fillRef idx="3">
+            <a:schemeClr val="accent1"/>
+          </a:fillRef>
+          <a:effectRef idx="2">
+            <a:schemeClr val="accent1"/>
+          </a:effectRef>
+          <a:fontRef idx="minor">
+            <a:schemeClr val="lt1"/>
+          </a:fontRef>
+        </p:style>
+        <p:txBody>
+          <a:bodyPr rtlCol="0" anchor="ctr"/>
+          <a:lstStyle/>
+          <a:p>
+            <a:pPr algn="ctr"/>
+          </a:p>
+        </p:txBody>
+      </p:sp>
+      <p:sp>
+        <p:nvSpPr>
           <p:cNvPr id="11" name="TextBox 10"/>
           <p:cNvSpPr txBox="1"/>
           <p:nvPr/>
@@ -11980,7 +15193,7 @@
                 </a:solidFill>
                 <a:latin typeface="Aptos"/>
               </a:rPr>
-              <a:t>Dimensionar o plantão pela demanda real</a:t>
+              <a:t>Converter demanda diária em turno fixo</a:t>
             </a:r>
           </a:p>
         </p:txBody>
@@ -12019,7 +15232,7 @@
                 </a:solidFill>
                 <a:latin typeface="Aptos"/>
               </a:rPr>
-              <a:t>Só 46% dos técnicos de sobreaviso são acionados por dia. Reduzir o nº de plantonistas nas faixas de baixo acionamento, ajustando a escala ao histórico de chamados por dia e faixa horária.</a:t>
+              <a:t>Nas 3 GAs estruturais: turno noturno fixo cobre a mediana de acionados; sobreaviso residual cobre o p90. Hora acionada: R$ 23,60 → turno: R$ 12,43. Economia: R$ 34,2 mil/mês.</a:t>
             </a:r>
           </a:p>
         </p:txBody>
@@ -12143,7 +15356,7 @@
                 </a:solidFill>
                 <a:latin typeface="Aptos"/>
               </a:rPr>
-              <a:t>Concentrar a escala na faixa que aciona</a:t>
+              <a:t>Escala regular de fim de semana</a:t>
             </a:r>
           </a:p>
         </p:txBody>
@@ -12182,7 +15395,7 @@
                 </a:solidFill>
                 <a:latin typeface="Aptos"/>
               </a:rPr>
-              <a:t>O acionamento se concentra na faixa Noite (44%). Enxugar plantão nas faixas de menor acionamento (dia e madrugada) e manter cobertura só onde a demanda real justifica.</a:t>
+              <a:t>46% das horas acionadas caem no sáb/dom, de dia (695 h) — hoje cobertas por sobreaviso, a forma mais cara. Revezamento de FDS (folguista/12x36) nas GAs estruturais elimina esse custo recorrente.</a:t>
             </a:r>
           </a:p>
         </p:txBody>
@@ -12306,7 +15519,7 @@
                 </a:solidFill>
                 <a:latin typeface="Aptos"/>
               </a:rPr>
-              <a:t>Cobrar as GAs que concentram o custo</a:t>
+              <a:t>Sobreaviso enxuto onde é eventual</a:t>
             </a:r>
           </a:p>
         </p:txBody>
@@ -12345,7 +15558,7 @@
                 </a:solidFill>
                 <a:latin typeface="Aptos"/>
               </a:rPr>
-              <a:t>Meta global de redução distribuída como acompanhamento pelas áreas líderes de horas de sobreaviso, com revisão semanal de escala versus acionamento efetivo.</a:t>
+              <a:t>Nas GAs que acionam ≤40% dos dias (Wagner, Dejamir Sousa), o pico histórico é 1 técnico: manter sobreaviso com plantão mínimo e revisão semanal de escala × acionamento.</a:t>
             </a:r>
           </a:p>
         </p:txBody>
@@ -12358,7 +15571,7 @@
         </p:nvSpPr>
         <p:spPr>
           <a:xfrm>
-            <a:off x="533400" y="3048000"/>
+            <a:off x="533400" y="3009900"/>
             <a:ext cx="5715000" cy="171450"/>
           </a:xfrm>
           <a:prstGeom prst="rect">
@@ -12398,8 +15611,8 @@
           <p:nvPr/>
         </p:nvGraphicFramePr>
         <p:xfrm>
-          <a:off x="533400" y="3276600"/>
-          <a:ext cx="11106150" cy="2743200"/>
+          <a:off x="533400" y="3238500"/>
+          <a:ext cx="11106150" cy="2857500"/>
         </p:xfrm>
         <a:graphic>
           <a:graphicData uri="http://schemas.openxmlformats.org/drawingml/2006/table">
@@ -12415,7 +15628,7 @@
                 <a:gridCol w="1428750"/>
                 <a:gridCol w="381000"/>
               </a:tblGrid>
-              <a:tr h="685800">
+              <a:tr h="571500">
                 <a:tc>
                   <a:txBody>
                     <a:bodyPr wrap="square"/>
@@ -12579,7 +15792,7 @@
                   </a:tcPr>
                 </a:tc>
               </a:tr>
-              <a:tr h="685800">
+              <a:tr h="571500">
                 <a:tc>
                   <a:txBody>
                     <a:bodyPr wrap="square"/>
@@ -12597,7 +15810,7 @@
                           </a:solidFill>
                           <a:latin typeface="Aptos"/>
                         </a:rPr>
-                        <a:t>Custo de horas em R$ 76,2 mil/mês, ante meta de R$ 33,7 mil</a:t>
+                        <a:t>3 GAs acionam 96–100% dos dias (R$ 70,5 mil/mês)</a:t>
                       </a:r>
                     </a:p>
                   </a:txBody>
@@ -12624,7 +15837,7 @@
                           </a:solidFill>
                           <a:latin typeface="Aptos"/>
                         </a:rPr>
-                        <a:t>Sobreaviso responde por 86% da cesta e o realizado já supera o orçado (13% acima). É a parte controlável do custo.</a:t>
+                        <a:t>Demanda diária e previsível (Miguel Barros, Rafael Nunes, Claudio) paga como sobreaviso + HE de acionamento — o instrumento errado para trabalho regular.</a:t>
                       </a:r>
                     </a:p>
                   </a:txBody>
@@ -12651,7 +15864,7 @@
                           </a:solidFill>
                           <a:latin typeface="Aptos"/>
                         </a:rPr>
-                        <a:t>Definir a meta de R$ 33,7 mil/mês por regional e abrir o gap de R$ 42,4 mil em plano de escala por GA.</a:t>
+                        <a:t>Dimensionar turno noturno fixo pela mediana de acionados e formalizar primeiro os técnicos já acionados toda semana; sobreaviso residual para o excedente (p90).</a:t>
                       </a:r>
                     </a:p>
                   </a:txBody>
@@ -12678,7 +15891,7 @@
                           </a:solidFill>
                           <a:latin typeface="Aptos"/>
                         </a:rPr>
-                        <a:t>Início imediato</a:t>
+                        <a:t>Próximo ciclo</a:t>
                       </a:r>
                     </a:p>
                   </a:txBody>
@@ -12705,7 +15918,7 @@
                           </a:solidFill>
                           <a:latin typeface="Aptos"/>
                         </a:rPr>
-                        <a:t>Gerência da regional + Planejamento</a:t>
+                        <a:t>Gerência regional + RH + Planejamento</a:t>
                       </a:r>
                     </a:p>
                   </a:txBody>
@@ -12743,7 +15956,7 @@
                   </a:tcPr>
                 </a:tc>
               </a:tr>
-              <a:tr h="685800">
+              <a:tr h="571500">
                 <a:tc>
                   <a:txBody>
                     <a:bodyPr wrap="square"/>
@@ -12761,7 +15974,7 @@
                           </a:solidFill>
                           <a:latin typeface="Aptos"/>
                         </a:rPr>
-                        <a:t>Só 21% do sobreaviso vira acionamento</a:t>
+                        <a:t>46% das horas acionadas caem no fim de semana</a:t>
                       </a:r>
                     </a:p>
                   </a:txBody>
@@ -12788,7 +16001,7 @@
                           </a:solidFill>
                           <a:latin typeface="Aptos"/>
                         </a:rPr>
-                        <a:t>36,2 técnicos/dia em espera para 16,6 acionados; escala dimensionada acima da demanda real.</a:t>
+                        <a:t>Sem escala regular de sáb/dom, a cobertura diurna do FDS (695 h) é feita via acionamento com adicional maior.</a:t>
                       </a:r>
                     </a:p>
                   </a:txBody>
@@ -12815,7 +16028,7 @@
                           </a:solidFill>
                           <a:latin typeface="Aptos"/>
                         </a:rPr>
-                        <a:t>Redimensionar a escala de sobreaviso pela demanda por dia e faixa horária; reduzir plantonistas nas faixas de baixo acionamento.</a:t>
+                        <a:t>Implantar revezamento de fim de semana nas GAs estruturais (folguista/12x36) e retirar o FDS diurno do sobreaviso.</a:t>
                       </a:r>
                     </a:p>
                   </a:txBody>
@@ -12869,7 +16082,7 @@
                           </a:solidFill>
                           <a:latin typeface="Aptos"/>
                         </a:rPr>
-                        <a:t>Coordenação de campo + Planejamento</a:t>
+                        <a:t>Planejamento de escala + Coordenação de campo</a:t>
                       </a:r>
                     </a:p>
                   </a:txBody>
@@ -12907,7 +16120,7 @@
                   </a:tcPr>
                 </a:tc>
               </a:tr>
-              <a:tr h="685800">
+              <a:tr h="571500">
                 <a:tc>
                   <a:txBody>
                     <a:bodyPr wrap="square"/>
@@ -12925,7 +16138,7 @@
                           </a:solidFill>
                           <a:latin typeface="Aptos"/>
                         </a:rPr>
-                        <a:t>Custo concentrado em poucas GAs</a:t>
+                        <a:t>GAs eventuais acionam ≤40% dos dias, pico de 1 técnico</a:t>
                       </a:r>
                     </a:p>
                   </a:txBody>
@@ -12952,7 +16165,7 @@
                           </a:solidFill>
                           <a:latin typeface="Aptos"/>
                         </a:rPr>
-                        <a:t>As 3 primeiras áreas concentram 89% das horas de sobreaviso.</a:t>
+                        <a:t>Nessas áreas (Wagner, Dejamir Sousa) o sobreaviso cumpre o papel certo: cobertura de evento raro com custo de espera baixo.</a:t>
                       </a:r>
                     </a:p>
                   </a:txBody>
@@ -12979,7 +16192,7 @@
                           </a:solidFill>
                           <a:latin typeface="Aptos"/>
                         </a:rPr>
-                        <a:t>Revisão semanal de escala versus acionamento nas GAs líderes; meta de redução acompanhada por área.</a:t>
+                        <a:t>Manter sobreaviso com 1 plantonista; acompanhar semanalmente escala × acionamento para não recriar gordura.</a:t>
                       </a:r>
                     </a:p>
                   </a:txBody>
@@ -13067,6 +16280,170 @@
                   <a:tcPr anchor="ctr" marL="85725" marR="76200" marT="47625" marB="47625">
                     <a:solidFill>
                       <a:srgbClr val="FFFFFF"/>
+                    </a:solidFill>
+                  </a:tcPr>
+                </a:tc>
+              </a:tr>
+              <a:tr h="571500">
+                <a:tc>
+                  <a:txBody>
+                    <a:bodyPr wrap="square"/>
+                    <a:lstStyle/>
+                    <a:p>
+                      <a:pPr algn="l">
+                        <a:lnSpc>
+                          <a:spcPct val="104000"/>
+                        </a:lnSpc>
+                      </a:pPr>
+                      <a:r>
+                        <a:rPr sz="1000" b="1">
+                          <a:solidFill>
+                            <a:srgbClr val="081551"/>
+                          </a:solidFill>
+                          <a:latin typeface="Aptos"/>
+                        </a:rPr>
+                        <a:t>Risco de descobertura se houver corte cego</a:t>
+                      </a:r>
+                    </a:p>
+                  </a:txBody>
+                  <a:tcPr anchor="t" marL="85725" marR="76200" marT="47625" marB="47625">
+                    <a:solidFill>
+                      <a:srgbClr val="F3F6FA"/>
+                    </a:solidFill>
+                  </a:tcPr>
+                </a:tc>
+                <a:tc>
+                  <a:txBody>
+                    <a:bodyPr wrap="square"/>
+                    <a:lstStyle/>
+                    <a:p>
+                      <a:pPr algn="l">
+                        <a:lnSpc>
+                          <a:spcPct val="104000"/>
+                        </a:lnSpc>
+                      </a:pPr>
+                      <a:r>
+                        <a:rPr sz="950" b="0">
+                          <a:solidFill>
+                            <a:srgbClr val="182238"/>
+                          </a:solidFill>
+                          <a:latin typeface="Aptos"/>
+                        </a:rPr>
+                        <a:t>Na maior GA o pico chegou a 14 técnicos acionados no mesmo dia — margem apertada sobre o plantão atual.</a:t>
+                      </a:r>
+                    </a:p>
+                  </a:txBody>
+                  <a:tcPr anchor="t" marL="85725" marR="76200" marT="47625" marB="47625">
+                    <a:solidFill>
+                      <a:srgbClr val="F3F6FA"/>
+                    </a:solidFill>
+                  </a:tcPr>
+                </a:tc>
+                <a:tc>
+                  <a:txBody>
+                    <a:bodyPr wrap="square"/>
+                    <a:lstStyle/>
+                    <a:p>
+                      <a:pPr algn="l">
+                        <a:lnSpc>
+                          <a:spcPct val="104000"/>
+                        </a:lnSpc>
+                      </a:pPr>
+                      <a:r>
+                        <a:rPr sz="950" b="0">
+                          <a:solidFill>
+                            <a:srgbClr val="182238"/>
+                          </a:solidFill>
+                          <a:latin typeface="Aptos"/>
+                        </a:rPr>
+                        <a:t>Regra de piso: nenhuma GA reduz plantão abaixo do p90 de acionados simultâneos sem turno fixo no lugar; pico raro coberto por backup entre GAs vizinhas.</a:t>
+                      </a:r>
+                    </a:p>
+                  </a:txBody>
+                  <a:tcPr anchor="t" marL="85725" marR="76200" marT="47625" marB="47625">
+                    <a:solidFill>
+                      <a:srgbClr val="F3F6FA"/>
+                    </a:solidFill>
+                  </a:tcPr>
+                </a:tc>
+                <a:tc>
+                  <a:txBody>
+                    <a:bodyPr wrap="square"/>
+                    <a:lstStyle/>
+                    <a:p>
+                      <a:pPr algn="l">
+                        <a:lnSpc>
+                          <a:spcPct val="104000"/>
+                        </a:lnSpc>
+                      </a:pPr>
+                      <a:r>
+                        <a:rPr sz="950" b="1">
+                          <a:solidFill>
+                            <a:srgbClr val="182238"/>
+                          </a:solidFill>
+                          <a:latin typeface="Aptos"/>
+                        </a:rPr>
+                        <a:t>Regra permanente</a:t>
+                      </a:r>
+                    </a:p>
+                  </a:txBody>
+                  <a:tcPr anchor="t" marL="85725" marR="76200" marT="47625" marB="47625">
+                    <a:solidFill>
+                      <a:srgbClr val="F3F6FA"/>
+                    </a:solidFill>
+                  </a:tcPr>
+                </a:tc>
+                <a:tc>
+                  <a:txBody>
+                    <a:bodyPr wrap="square"/>
+                    <a:lstStyle/>
+                    <a:p>
+                      <a:pPr algn="l">
+                        <a:lnSpc>
+                          <a:spcPct val="104000"/>
+                        </a:lnSpc>
+                      </a:pPr>
+                      <a:r>
+                        <a:rPr sz="950" b="0">
+                          <a:solidFill>
+                            <a:srgbClr val="182238"/>
+                          </a:solidFill>
+                          <a:latin typeface="Aptos"/>
+                        </a:rPr>
+                        <a:t>Gerência regional</a:t>
+                      </a:r>
+                    </a:p>
+                  </a:txBody>
+                  <a:tcPr anchor="t" marL="85725" marR="76200" marT="47625" marB="47625">
+                    <a:solidFill>
+                      <a:srgbClr val="F3F6FA"/>
+                    </a:solidFill>
+                  </a:tcPr>
+                </a:tc>
+                <a:tc>
+                  <a:txBody>
+                    <a:bodyPr wrap="square"/>
+                    <a:lstStyle/>
+                    <a:p>
+                      <a:pPr algn="ctr">
+                        <a:lnSpc>
+                          <a:spcPct val="104000"/>
+                        </a:lnSpc>
+                      </a:pPr>
+                      <a:r>
+                        <a:rPr sz="1200" b="0">
+                          <a:solidFill>
+                            <a:srgbClr val="E4BD30"/>
+                          </a:solidFill>
+                          <a:latin typeface="Aptos"/>
+                        </a:rPr>
+                        <a:t>●</a:t>
+                      </a:r>
+                    </a:p>
+                  </a:txBody>
+                  <a:tcPr anchor="ctr" marL="85725" marR="76200" marT="47625" marB="47625">
+                    <a:solidFill>
+                      <a:srgbClr val="F3F6FA"/>
                     </a:solidFill>
                   </a:tcPr>
                 </a:tc>

--- a/outputs/horas/Horas_Norte_Executivo.pptx
+++ b/outputs/horas/Horas_Norte_Executivo.pptx
@@ -10610,7 +10610,7 @@
         <p:spPr>
           <a:xfrm>
             <a:off x="6667500" y="1428750"/>
-            <a:ext cx="4972050" cy="1428750"/>
+            <a:ext cx="4972050" cy="1638300"/>
           </a:xfrm>
           <a:prstGeom prst="roundRect">
             <a:avLst>
@@ -10655,7 +10655,7 @@
         </p:nvSpPr>
         <p:spPr>
           <a:xfrm>
-            <a:off x="6877050" y="1581150"/>
+            <a:off x="6877050" y="1562100"/>
             <a:ext cx="2857500" cy="133350"/>
           </a:xfrm>
           <a:prstGeom prst="rect">
@@ -10694,7 +10694,7 @@
         </p:nvSpPr>
         <p:spPr>
           <a:xfrm>
-            <a:off x="6877050" y="1771650"/>
+            <a:off x="6877050" y="1733550"/>
             <a:ext cx="1524000" cy="457200"/>
           </a:xfrm>
           <a:prstGeom prst="rect">
@@ -10714,7 +10714,7 @@
               </a:lnSpc>
             </a:pPr>
             <a:r>
-              <a:rPr sz="3800" b="1">
+              <a:rPr sz="3600" b="1">
                 <a:solidFill>
                   <a:srgbClr val="42DF4B"/>
                 </a:solidFill>
@@ -10733,8 +10733,8 @@
         </p:nvSpPr>
         <p:spPr>
           <a:xfrm>
-            <a:off x="6877050" y="2266950"/>
-            <a:ext cx="4572000" cy="533400"/>
+            <a:off x="6877050" y="2209800"/>
+            <a:ext cx="4572000" cy="781050"/>
           </a:xfrm>
           <a:prstGeom prst="rect">
             <a:avLst/>
@@ -10749,11 +10749,11 @@
           <a:p>
             <a:pPr algn="l">
               <a:lnSpc>
-                <a:spcPct val="106000"/>
+                <a:spcPct val="108000"/>
               </a:lnSpc>
             </a:pPr>
             <a:r>
-              <a:rPr sz="1100" b="0">
+              <a:rPr sz="1050" b="0">
                 <a:solidFill>
                   <a:srgbClr val="FFFFFF"/>
                 </a:solidFill>
@@ -10773,7 +10773,7 @@
           <p:nvPr/>
         </p:nvGraphicFramePr>
         <p:xfrm>
-          <a:off x="6667500" y="3048000"/>
+          <a:off x="6667500" y="3238500"/>
           <a:ext cx="4972050" cy="2857500"/>
         </p:xfrm>
         <a:graphic>
